--- a/ressources/veloville/docs/e02_cas_pratique_VeloVille_Thomas_Lerond.pptx
+++ b/ressources/veloville/docs/e02_cas_pratique_VeloVille_Thomas_Lerond.pptx
@@ -1,9 +1,12 @@
 
 <file path=ppt/presentation.xml><?xml version="1.0" encoding="utf-8"?>
-<p:presentation xmlns:a="http://schemas.openxmlformats.org/drawingml/2006/main" xmlns:r="http://schemas.openxmlformats.org/officeDocument/2006/relationships" xmlns:p="http://schemas.openxmlformats.org/presentationml/2006/main" autoCompressPictures="0">
+<p:presentation xmlns:a="http://schemas.openxmlformats.org/drawingml/2006/main" xmlns:r="http://schemas.openxmlformats.org/officeDocument/2006/relationships" xmlns:p="http://schemas.openxmlformats.org/presentationml/2006/main" showSpecialPlsOnTitleSld="0" autoCompressPictures="0">
   <p:sldMasterIdLst>
     <p:sldMasterId id="2147483648" r:id="rId1"/>
   </p:sldMasterIdLst>
+  <p:notesMasterIdLst>
+    <p:notesMasterId r:id="rId16"/>
+  </p:notesMasterIdLst>
   <p:sldIdLst>
     <p:sldId id="256" r:id="rId2"/>
     <p:sldId id="258" r:id="rId3"/>
@@ -117,7 +120,361 @@
       </a:defRPr>
     </a:lvl9pPr>
   </p:defaultTextStyle>
+  <p:extLst>
+    <p:ext uri="{EFAFB233-063F-42B5-8137-9DF3F51BA10A}">
+      <p15:sldGuideLst xmlns:p15="http://schemas.microsoft.com/office/powerpoint/2012/main"/>
+    </p:ext>
+  </p:extLst>
 </p:presentation>
+</file>
+
+<file path=ppt/notesMasters/notesMaster1.xml><?xml version="1.0" encoding="utf-8"?>
+<p:notesMaster xmlns:a="http://schemas.openxmlformats.org/drawingml/2006/main" xmlns:r="http://schemas.openxmlformats.org/officeDocument/2006/relationships" xmlns:p="http://schemas.openxmlformats.org/presentationml/2006/main">
+  <p:cSld>
+    <p:bg>
+      <p:bgRef idx="1001">
+        <a:schemeClr val="bg1"/>
+      </p:bgRef>
+    </p:bg>
+    <p:spTree>
+      <p:nvGrpSpPr>
+        <p:cNvPr id="1" name=""/>
+        <p:cNvGrpSpPr/>
+        <p:nvPr/>
+      </p:nvGrpSpPr>
+      <p:grpSpPr>
+        <a:xfrm>
+          <a:off x="0" y="0"/>
+          <a:ext cx="0" cy="0"/>
+          <a:chOff x="0" y="0"/>
+          <a:chExt cx="0" cy="0"/>
+        </a:xfrm>
+      </p:grpSpPr>
+      <p:sp>
+        <p:nvSpPr>
+          <p:cNvPr id="2" name="Espace réservé de l'en-tête 1"/>
+          <p:cNvSpPr>
+            <a:spLocks noGrp="1"/>
+          </p:cNvSpPr>
+          <p:nvPr>
+            <p:ph type="hdr" sz="quarter"/>
+          </p:nvPr>
+        </p:nvSpPr>
+        <p:spPr>
+          <a:xfrm>
+            <a:off x="0" y="0"/>
+            <a:ext cx="2971800" cy="458788"/>
+          </a:xfrm>
+          <a:prstGeom prst="rect">
+            <a:avLst/>
+          </a:prstGeom>
+        </p:spPr>
+        <p:txBody>
+          <a:bodyPr vert="horz" lIns="91440" tIns="45720" rIns="91440" bIns="45720" rtlCol="0"/>
+          <a:lstStyle>
+            <a:lvl1pPr algn="l">
+              <a:defRPr sz="1200"/>
+            </a:lvl1pPr>
+          </a:lstStyle>
+          <a:p>
+            <a:endParaRPr lang="fr-FR"/>
+          </a:p>
+        </p:txBody>
+      </p:sp>
+      <p:sp>
+        <p:nvSpPr>
+          <p:cNvPr id="3" name="Espace réservé de la date 2"/>
+          <p:cNvSpPr>
+            <a:spLocks noGrp="1"/>
+          </p:cNvSpPr>
+          <p:nvPr>
+            <p:ph type="dt" idx="1"/>
+          </p:nvPr>
+        </p:nvSpPr>
+        <p:spPr>
+          <a:xfrm>
+            <a:off x="3884613" y="0"/>
+            <a:ext cx="2971800" cy="458788"/>
+          </a:xfrm>
+          <a:prstGeom prst="rect">
+            <a:avLst/>
+          </a:prstGeom>
+        </p:spPr>
+        <p:txBody>
+          <a:bodyPr vert="horz" lIns="91440" tIns="45720" rIns="91440" bIns="45720" rtlCol="0"/>
+          <a:lstStyle>
+            <a:lvl1pPr algn="r">
+              <a:defRPr sz="1200"/>
+            </a:lvl1pPr>
+          </a:lstStyle>
+          <a:p>
+            <a:fld id="{AE9D2903-84BE-4582-B4D1-5151866353AC}" type="datetimeFigureOut">
+              <a:rPr lang="fr-FR" smtClean="0"/>
+              <a:t>15/10/2026</a:t>
+            </a:fld>
+            <a:endParaRPr lang="fr-FR"/>
+          </a:p>
+        </p:txBody>
+      </p:sp>
+      <p:sp>
+        <p:nvSpPr>
+          <p:cNvPr id="4" name="Espace réservé de l'image des diapositives 3"/>
+          <p:cNvSpPr>
+            <a:spLocks noGrp="1" noRot="1" noChangeAspect="1"/>
+          </p:cNvSpPr>
+          <p:nvPr>
+            <p:ph type="sldImg" idx="2"/>
+          </p:nvPr>
+        </p:nvSpPr>
+        <p:spPr>
+          <a:xfrm>
+            <a:off x="685800" y="1143000"/>
+            <a:ext cx="5486400" cy="3086100"/>
+          </a:xfrm>
+          <a:prstGeom prst="rect">
+            <a:avLst/>
+          </a:prstGeom>
+          <a:noFill/>
+          <a:ln w="12700">
+            <a:solidFill>
+              <a:prstClr val="black"/>
+            </a:solidFill>
+          </a:ln>
+        </p:spPr>
+        <p:txBody>
+          <a:bodyPr vert="horz" lIns="91440" tIns="45720" rIns="91440" bIns="45720" rtlCol="0" anchor="ctr"/>
+          <a:lstStyle/>
+          <a:p>
+            <a:endParaRPr lang="fr-FR"/>
+          </a:p>
+        </p:txBody>
+      </p:sp>
+      <p:sp>
+        <p:nvSpPr>
+          <p:cNvPr id="5" name="Espace réservé des notes 4"/>
+          <p:cNvSpPr>
+            <a:spLocks noGrp="1"/>
+          </p:cNvSpPr>
+          <p:nvPr>
+            <p:ph type="body" sz="quarter" idx="3"/>
+          </p:nvPr>
+        </p:nvSpPr>
+        <p:spPr>
+          <a:xfrm>
+            <a:off x="685800" y="4400550"/>
+            <a:ext cx="5486400" cy="3600450"/>
+          </a:xfrm>
+          <a:prstGeom prst="rect">
+            <a:avLst/>
+          </a:prstGeom>
+        </p:spPr>
+        <p:txBody>
+          <a:bodyPr vert="horz" lIns="91440" tIns="45720" rIns="91440" bIns="45720" rtlCol="0"/>
+          <a:lstStyle/>
+          <a:p>
+            <a:pPr lvl="0"/>
+            <a:r>
+              <a:rPr lang="fr-FR"/>
+              <a:t>Cliquez pour modifier les styles du texte du masque</a:t>
+            </a:r>
+          </a:p>
+          <a:p>
+            <a:pPr lvl="1"/>
+            <a:r>
+              <a:rPr lang="fr-FR"/>
+              <a:t>Deuxième niveau</a:t>
+            </a:r>
+          </a:p>
+          <a:p>
+            <a:pPr lvl="2"/>
+            <a:r>
+              <a:rPr lang="fr-FR"/>
+              <a:t>Troisième niveau</a:t>
+            </a:r>
+          </a:p>
+          <a:p>
+            <a:pPr lvl="3"/>
+            <a:r>
+              <a:rPr lang="fr-FR"/>
+              <a:t>Quatrième niveau</a:t>
+            </a:r>
+          </a:p>
+          <a:p>
+            <a:pPr lvl="4"/>
+            <a:r>
+              <a:rPr lang="fr-FR"/>
+              <a:t>Cinquième niveau</a:t>
+            </a:r>
+          </a:p>
+        </p:txBody>
+      </p:sp>
+      <p:sp>
+        <p:nvSpPr>
+          <p:cNvPr id="6" name="Espace réservé du pied de page 5"/>
+          <p:cNvSpPr>
+            <a:spLocks noGrp="1"/>
+          </p:cNvSpPr>
+          <p:nvPr>
+            <p:ph type="ftr" sz="quarter" idx="4"/>
+          </p:nvPr>
+        </p:nvSpPr>
+        <p:spPr>
+          <a:xfrm>
+            <a:off x="0" y="8685213"/>
+            <a:ext cx="2971800" cy="458787"/>
+          </a:xfrm>
+          <a:prstGeom prst="rect">
+            <a:avLst/>
+          </a:prstGeom>
+        </p:spPr>
+        <p:txBody>
+          <a:bodyPr vert="horz" lIns="91440" tIns="45720" rIns="91440" bIns="45720" rtlCol="0" anchor="b"/>
+          <a:lstStyle>
+            <a:lvl1pPr algn="l">
+              <a:defRPr sz="1200"/>
+            </a:lvl1pPr>
+          </a:lstStyle>
+          <a:p>
+            <a:endParaRPr lang="fr-FR"/>
+          </a:p>
+        </p:txBody>
+      </p:sp>
+      <p:sp>
+        <p:nvSpPr>
+          <p:cNvPr id="7" name="Espace réservé du numéro de diapositive 6"/>
+          <p:cNvSpPr>
+            <a:spLocks noGrp="1"/>
+          </p:cNvSpPr>
+          <p:nvPr>
+            <p:ph type="sldNum" sz="quarter" idx="5"/>
+          </p:nvPr>
+        </p:nvSpPr>
+        <p:spPr>
+          <a:xfrm>
+            <a:off x="3884613" y="8685213"/>
+            <a:ext cx="2971800" cy="458787"/>
+          </a:xfrm>
+          <a:prstGeom prst="rect">
+            <a:avLst/>
+          </a:prstGeom>
+        </p:spPr>
+        <p:txBody>
+          <a:bodyPr vert="horz" lIns="91440" tIns="45720" rIns="91440" bIns="45720" rtlCol="0" anchor="b"/>
+          <a:lstStyle>
+            <a:lvl1pPr algn="r">
+              <a:defRPr sz="1200"/>
+            </a:lvl1pPr>
+          </a:lstStyle>
+          <a:p>
+            <a:fld id="{B8C71FF0-3D2A-4BCD-8C76-FB0E385D57E9}" type="slidenum">
+              <a:rPr lang="fr-FR" smtClean="0"/>
+              <a:t>‹N°›</a:t>
+            </a:fld>
+            <a:endParaRPr lang="fr-FR"/>
+          </a:p>
+        </p:txBody>
+      </p:sp>
+    </p:spTree>
+    <p:extLst>
+      <p:ext uri="{BB962C8B-B14F-4D97-AF65-F5344CB8AC3E}">
+        <p14:creationId xmlns:p14="http://schemas.microsoft.com/office/powerpoint/2010/main" val="1264294575"/>
+      </p:ext>
+    </p:extLst>
+  </p:cSld>
+  <p:clrMap bg1="lt1" tx1="dk1" bg2="lt2" tx2="dk2" accent1="accent1" accent2="accent2" accent3="accent3" accent4="accent4" accent5="accent5" accent6="accent6" hlink="hlink" folHlink="folHlink"/>
+  <p:notesStyle>
+    <a:lvl1pPr marL="0" algn="l" defTabSz="914400" rtl="0" eaLnBrk="1" latinLnBrk="0" hangingPunct="1">
+      <a:defRPr sz="1200" kern="1200">
+        <a:solidFill>
+          <a:schemeClr val="tx1"/>
+        </a:solidFill>
+        <a:latin typeface="+mn-lt"/>
+        <a:ea typeface="+mn-ea"/>
+        <a:cs typeface="+mn-cs"/>
+      </a:defRPr>
+    </a:lvl1pPr>
+    <a:lvl2pPr marL="457200" algn="l" defTabSz="914400" rtl="0" eaLnBrk="1" latinLnBrk="0" hangingPunct="1">
+      <a:defRPr sz="1200" kern="1200">
+        <a:solidFill>
+          <a:schemeClr val="tx1"/>
+        </a:solidFill>
+        <a:latin typeface="+mn-lt"/>
+        <a:ea typeface="+mn-ea"/>
+        <a:cs typeface="+mn-cs"/>
+      </a:defRPr>
+    </a:lvl2pPr>
+    <a:lvl3pPr marL="914400" algn="l" defTabSz="914400" rtl="0" eaLnBrk="1" latinLnBrk="0" hangingPunct="1">
+      <a:defRPr sz="1200" kern="1200">
+        <a:solidFill>
+          <a:schemeClr val="tx1"/>
+        </a:solidFill>
+        <a:latin typeface="+mn-lt"/>
+        <a:ea typeface="+mn-ea"/>
+        <a:cs typeface="+mn-cs"/>
+      </a:defRPr>
+    </a:lvl3pPr>
+    <a:lvl4pPr marL="1371600" algn="l" defTabSz="914400" rtl="0" eaLnBrk="1" latinLnBrk="0" hangingPunct="1">
+      <a:defRPr sz="1200" kern="1200">
+        <a:solidFill>
+          <a:schemeClr val="tx1"/>
+        </a:solidFill>
+        <a:latin typeface="+mn-lt"/>
+        <a:ea typeface="+mn-ea"/>
+        <a:cs typeface="+mn-cs"/>
+      </a:defRPr>
+    </a:lvl4pPr>
+    <a:lvl5pPr marL="1828800" algn="l" defTabSz="914400" rtl="0" eaLnBrk="1" latinLnBrk="0" hangingPunct="1">
+      <a:defRPr sz="1200" kern="1200">
+        <a:solidFill>
+          <a:schemeClr val="tx1"/>
+        </a:solidFill>
+        <a:latin typeface="+mn-lt"/>
+        <a:ea typeface="+mn-ea"/>
+        <a:cs typeface="+mn-cs"/>
+      </a:defRPr>
+    </a:lvl5pPr>
+    <a:lvl6pPr marL="2286000" algn="l" defTabSz="914400" rtl="0" eaLnBrk="1" latinLnBrk="0" hangingPunct="1">
+      <a:defRPr sz="1200" kern="1200">
+        <a:solidFill>
+          <a:schemeClr val="tx1"/>
+        </a:solidFill>
+        <a:latin typeface="+mn-lt"/>
+        <a:ea typeface="+mn-ea"/>
+        <a:cs typeface="+mn-cs"/>
+      </a:defRPr>
+    </a:lvl6pPr>
+    <a:lvl7pPr marL="2743200" algn="l" defTabSz="914400" rtl="0" eaLnBrk="1" latinLnBrk="0" hangingPunct="1">
+      <a:defRPr sz="1200" kern="1200">
+        <a:solidFill>
+          <a:schemeClr val="tx1"/>
+        </a:solidFill>
+        <a:latin typeface="+mn-lt"/>
+        <a:ea typeface="+mn-ea"/>
+        <a:cs typeface="+mn-cs"/>
+      </a:defRPr>
+    </a:lvl7pPr>
+    <a:lvl8pPr marL="3200400" algn="l" defTabSz="914400" rtl="0" eaLnBrk="1" latinLnBrk="0" hangingPunct="1">
+      <a:defRPr sz="1200" kern="1200">
+        <a:solidFill>
+          <a:schemeClr val="tx1"/>
+        </a:solidFill>
+        <a:latin typeface="+mn-lt"/>
+        <a:ea typeface="+mn-ea"/>
+        <a:cs typeface="+mn-cs"/>
+      </a:defRPr>
+    </a:lvl8pPr>
+    <a:lvl9pPr marL="3657600" algn="l" defTabSz="914400" rtl="0" eaLnBrk="1" latinLnBrk="0" hangingPunct="1">
+      <a:defRPr sz="1200" kern="1200">
+        <a:solidFill>
+          <a:schemeClr val="tx1"/>
+        </a:solidFill>
+        <a:latin typeface="+mn-lt"/>
+        <a:ea typeface="+mn-ea"/>
+        <a:cs typeface="+mn-cs"/>
+      </a:defRPr>
+    </a:lvl9pPr>
+  </p:notesStyle>
+</p:notesMaster>
 </file>
 
 <file path=ppt/slideLayouts/slideLayout1.xml><?xml version="1.0" encoding="utf-8"?>
@@ -331,11 +688,10 @@
           <a:bodyPr/>
           <a:lstStyle/>
           <a:p>
-            <a:fld id="{B61BEF0D-F0BB-DE4B-95CE-6DB70DBA9567}" type="datetimeFigureOut">
-              <a:rPr lang="en-US" dirty="0"/>
-              <a:pPr/>
-              <a:t>10/15/2026</a:t>
-            </a:fld>
+            <a:r>
+              <a:rPr lang="fr-FR"/>
+              <a:t>20/10/2026</a:t>
+            </a:r>
             <a:endParaRPr lang="en-US" dirty="0"/>
           </a:p>
         </p:txBody>
@@ -355,6 +711,10 @@
           <a:bodyPr/>
           <a:lstStyle/>
           <a:p>
+            <a:r>
+              <a:rPr lang="fr-FR"/>
+              <a:t>VeloVille --- Cas Pratique --- Thomas Lerond</a:t>
+            </a:r>
             <a:endParaRPr lang="en-US" dirty="0"/>
           </a:p>
         </p:txBody>
@@ -619,11 +979,10 @@
           <a:bodyPr/>
           <a:lstStyle/>
           <a:p>
-            <a:fld id="{B61BEF0D-F0BB-DE4B-95CE-6DB70DBA9567}" type="datetimeFigureOut">
-              <a:rPr lang="en-US" dirty="0"/>
-              <a:pPr/>
-              <a:t>10/15/2026</a:t>
-            </a:fld>
+            <a:r>
+              <a:rPr lang="fr-FR"/>
+              <a:t>20/10/2026</a:t>
+            </a:r>
             <a:endParaRPr lang="en-US" dirty="0"/>
           </a:p>
         </p:txBody>
@@ -643,6 +1002,10 @@
           <a:bodyPr/>
           <a:lstStyle/>
           <a:p>
+            <a:r>
+              <a:rPr lang="fr-FR"/>
+              <a:t>VeloVille --- Cas Pratique --- Thomas Lerond</a:t>
+            </a:r>
             <a:endParaRPr lang="en-US" dirty="0"/>
           </a:p>
         </p:txBody>
@@ -875,11 +1238,10 @@
           <a:bodyPr/>
           <a:lstStyle/>
           <a:p>
-            <a:fld id="{B61BEF0D-F0BB-DE4B-95CE-6DB70DBA9567}" type="datetimeFigureOut">
-              <a:rPr lang="en-US" dirty="0"/>
-              <a:pPr/>
-              <a:t>10/15/2026</a:t>
-            </a:fld>
+            <a:r>
+              <a:rPr lang="fr-FR"/>
+              <a:t>20/10/2026</a:t>
+            </a:r>
             <a:endParaRPr lang="en-US" dirty="0"/>
           </a:p>
         </p:txBody>
@@ -899,6 +1261,10 @@
           <a:bodyPr/>
           <a:lstStyle/>
           <a:p>
+            <a:r>
+              <a:rPr lang="fr-FR"/>
+              <a:t>VeloVille --- Cas Pratique --- Thomas Lerond</a:t>
+            </a:r>
             <a:endParaRPr lang="en-US" dirty="0"/>
           </a:p>
         </p:txBody>
@@ -1341,11 +1707,10 @@
           <a:bodyPr/>
           <a:lstStyle/>
           <a:p>
-            <a:fld id="{B61BEF0D-F0BB-DE4B-95CE-6DB70DBA9567}" type="datetimeFigureOut">
-              <a:rPr lang="en-US" dirty="0"/>
-              <a:pPr/>
-              <a:t>10/15/2026</a:t>
-            </a:fld>
+            <a:r>
+              <a:rPr lang="fr-FR"/>
+              <a:t>20/10/2026</a:t>
+            </a:r>
             <a:endParaRPr lang="en-US" dirty="0"/>
           </a:p>
         </p:txBody>
@@ -1365,6 +1730,10 @@
           <a:bodyPr/>
           <a:lstStyle/>
           <a:p>
+            <a:r>
+              <a:rPr lang="fr-FR"/>
+              <a:t>VeloVille --- Cas Pratique --- Thomas Lerond</a:t>
+            </a:r>
             <a:endParaRPr lang="en-US" dirty="0"/>
           </a:p>
         </p:txBody>
@@ -1518,11 +1887,10 @@
           <a:bodyPr/>
           <a:lstStyle/>
           <a:p>
-            <a:fld id="{B61BEF0D-F0BB-DE4B-95CE-6DB70DBA9567}" type="datetimeFigureOut">
-              <a:rPr lang="en-US" dirty="0"/>
-              <a:pPr/>
-              <a:t>10/15/2026</a:t>
-            </a:fld>
+            <a:r>
+              <a:rPr lang="fr-FR"/>
+              <a:t>20/10/2026</a:t>
+            </a:r>
             <a:endParaRPr lang="en-US" dirty="0"/>
           </a:p>
         </p:txBody>
@@ -1542,6 +1910,10 @@
           <a:bodyPr/>
           <a:lstStyle/>
           <a:p>
+            <a:r>
+              <a:rPr lang="fr-FR"/>
+              <a:t>VeloVille --- Cas Pratique --- Thomas Lerond</a:t>
+            </a:r>
             <a:endParaRPr lang="en-US" dirty="0"/>
           </a:p>
         </p:txBody>
@@ -2091,11 +2463,10 @@
           <a:bodyPr/>
           <a:lstStyle/>
           <a:p>
-            <a:fld id="{B61BEF0D-F0BB-DE4B-95CE-6DB70DBA9567}" type="datetimeFigureOut">
-              <a:rPr lang="en-US" dirty="0"/>
-              <a:pPr/>
-              <a:t>10/15/2026</a:t>
-            </a:fld>
+            <a:r>
+              <a:rPr lang="fr-FR"/>
+              <a:t>20/10/2026</a:t>
+            </a:r>
             <a:endParaRPr lang="en-US" dirty="0"/>
           </a:p>
         </p:txBody>
@@ -2115,6 +2486,10 @@
           <a:bodyPr/>
           <a:lstStyle/>
           <a:p>
+            <a:r>
+              <a:rPr lang="fr-FR"/>
+              <a:t>VeloVille --- Cas Pratique --- Thomas Lerond</a:t>
+            </a:r>
             <a:endParaRPr lang="en-US" dirty="0"/>
           </a:p>
         </p:txBody>
@@ -2420,11 +2795,10 @@
           <a:bodyPr/>
           <a:lstStyle/>
           <a:p>
-            <a:fld id="{B61BEF0D-F0BB-DE4B-95CE-6DB70DBA9567}" type="datetimeFigureOut">
-              <a:rPr lang="en-US" dirty="0"/>
-              <a:pPr/>
-              <a:t>10/15/2026</a:t>
-            </a:fld>
+            <a:r>
+              <a:rPr lang="fr-FR"/>
+              <a:t>20/10/2026</a:t>
+            </a:r>
             <a:endParaRPr lang="en-US" dirty="0"/>
           </a:p>
         </p:txBody>
@@ -2444,6 +2818,10 @@
           <a:bodyPr/>
           <a:lstStyle/>
           <a:p>
+            <a:r>
+              <a:rPr lang="fr-FR"/>
+              <a:t>VeloVille --- Cas Pratique --- Thomas Lerond</a:t>
+            </a:r>
             <a:endParaRPr lang="en-US" dirty="0"/>
           </a:p>
         </p:txBody>
@@ -2592,11 +2970,10 @@
           <a:bodyPr/>
           <a:lstStyle/>
           <a:p>
-            <a:fld id="{B61BEF0D-F0BB-DE4B-95CE-6DB70DBA9567}" type="datetimeFigureOut">
-              <a:rPr lang="en-US" dirty="0"/>
-              <a:pPr/>
-              <a:t>10/15/2026</a:t>
-            </a:fld>
+            <a:r>
+              <a:rPr lang="fr-FR"/>
+              <a:t>20/10/2026</a:t>
+            </a:r>
             <a:endParaRPr lang="en-US" dirty="0"/>
           </a:p>
         </p:txBody>
@@ -2616,6 +2993,10 @@
           <a:bodyPr/>
           <a:lstStyle/>
           <a:p>
+            <a:r>
+              <a:rPr lang="fr-FR"/>
+              <a:t>VeloVille --- Cas Pratique --- Thomas Lerond</a:t>
+            </a:r>
             <a:endParaRPr lang="en-US" dirty="0"/>
           </a:p>
         </p:txBody>
@@ -2769,11 +3150,10 @@
           <a:bodyPr/>
           <a:lstStyle/>
           <a:p>
-            <a:fld id="{B61BEF0D-F0BB-DE4B-95CE-6DB70DBA9567}" type="datetimeFigureOut">
-              <a:rPr lang="en-US" dirty="0"/>
-              <a:pPr/>
-              <a:t>10/15/2026</a:t>
-            </a:fld>
+            <a:r>
+              <a:rPr lang="fr-FR"/>
+              <a:t>20/10/2026</a:t>
+            </a:r>
             <a:endParaRPr lang="en-US" dirty="0"/>
           </a:p>
         </p:txBody>
@@ -2793,6 +3173,10 @@
           <a:bodyPr/>
           <a:lstStyle/>
           <a:p>
+            <a:r>
+              <a:rPr lang="fr-FR"/>
+              <a:t>VeloVille --- Cas Pratique --- Thomas Lerond</a:t>
+            </a:r>
             <a:endParaRPr lang="en-US" dirty="0"/>
           </a:p>
         </p:txBody>
@@ -2956,11 +3340,10 @@
           <a:bodyPr/>
           <a:lstStyle/>
           <a:p>
-            <a:fld id="{B61BEF0D-F0BB-DE4B-95CE-6DB70DBA9567}" type="datetimeFigureOut">
-              <a:rPr lang="en-US" dirty="0"/>
-              <a:pPr/>
-              <a:t>10/15/2026</a:t>
-            </a:fld>
+            <a:r>
+              <a:rPr lang="fr-FR"/>
+              <a:t>20/10/2026</a:t>
+            </a:r>
             <a:endParaRPr lang="en-US" dirty="0"/>
           </a:p>
         </p:txBody>
@@ -2980,6 +3363,10 @@
           <a:bodyPr/>
           <a:lstStyle/>
           <a:p>
+            <a:r>
+              <a:rPr lang="fr-FR"/>
+              <a:t>VeloVille --- Cas Pratique --- Thomas Lerond</a:t>
+            </a:r>
             <a:endParaRPr lang="en-US" dirty="0"/>
           </a:p>
         </p:txBody>
@@ -3210,11 +3597,10 @@
           <a:bodyPr/>
           <a:lstStyle/>
           <a:p>
-            <a:fld id="{B61BEF0D-F0BB-DE4B-95CE-6DB70DBA9567}" type="datetimeFigureOut">
-              <a:rPr lang="en-US" dirty="0"/>
-              <a:pPr/>
-              <a:t>10/15/2026</a:t>
-            </a:fld>
+            <a:r>
+              <a:rPr lang="fr-FR"/>
+              <a:t>20/10/2026</a:t>
+            </a:r>
             <a:endParaRPr lang="en-US" dirty="0"/>
           </a:p>
         </p:txBody>
@@ -3234,6 +3620,10 @@
           <a:bodyPr/>
           <a:lstStyle/>
           <a:p>
+            <a:r>
+              <a:rPr lang="fr-FR"/>
+              <a:t>VeloVille --- Cas Pratique --- Thomas Lerond</a:t>
+            </a:r>
             <a:endParaRPr lang="en-US" dirty="0"/>
           </a:p>
         </p:txBody>
@@ -3503,11 +3893,10 @@
           <a:bodyPr/>
           <a:lstStyle/>
           <a:p>
-            <a:fld id="{B61BEF0D-F0BB-DE4B-95CE-6DB70DBA9567}" type="datetimeFigureOut">
-              <a:rPr lang="en-US" dirty="0"/>
-              <a:pPr/>
-              <a:t>10/15/2026</a:t>
-            </a:fld>
+            <a:r>
+              <a:rPr lang="fr-FR"/>
+              <a:t>20/10/2026</a:t>
+            </a:r>
             <a:endParaRPr lang="en-US" dirty="0"/>
           </a:p>
         </p:txBody>
@@ -3527,6 +3916,10 @@
           <a:bodyPr/>
           <a:lstStyle/>
           <a:p>
+            <a:r>
+              <a:rPr lang="fr-FR"/>
+              <a:t>VeloVille --- Cas Pratique --- Thomas Lerond</a:t>
+            </a:r>
             <a:endParaRPr lang="en-US" dirty="0"/>
           </a:p>
         </p:txBody>
@@ -3930,11 +4323,10 @@
           <a:bodyPr/>
           <a:lstStyle/>
           <a:p>
-            <a:fld id="{B61BEF0D-F0BB-DE4B-95CE-6DB70DBA9567}" type="datetimeFigureOut">
-              <a:rPr lang="en-US" dirty="0"/>
-              <a:pPr/>
-              <a:t>10/15/2026</a:t>
-            </a:fld>
+            <a:r>
+              <a:rPr lang="fr-FR"/>
+              <a:t>20/10/2026</a:t>
+            </a:r>
             <a:endParaRPr lang="en-US" dirty="0"/>
           </a:p>
         </p:txBody>
@@ -3954,6 +4346,10 @@
           <a:bodyPr/>
           <a:lstStyle/>
           <a:p>
+            <a:r>
+              <a:rPr lang="fr-FR"/>
+              <a:t>VeloVille --- Cas Pratique --- Thomas Lerond</a:t>
+            </a:r>
             <a:endParaRPr lang="en-US" dirty="0"/>
           </a:p>
         </p:txBody>
@@ -4045,11 +4441,10 @@
           <a:bodyPr/>
           <a:lstStyle/>
           <a:p>
-            <a:fld id="{B61BEF0D-F0BB-DE4B-95CE-6DB70DBA9567}" type="datetimeFigureOut">
-              <a:rPr lang="en-US" dirty="0"/>
-              <a:pPr/>
-              <a:t>10/15/2026</a:t>
-            </a:fld>
+            <a:r>
+              <a:rPr lang="fr-FR"/>
+              <a:t>20/10/2026</a:t>
+            </a:r>
             <a:endParaRPr lang="en-US" dirty="0"/>
           </a:p>
         </p:txBody>
@@ -4069,6 +4464,10 @@
           <a:bodyPr/>
           <a:lstStyle/>
           <a:p>
+            <a:r>
+              <a:rPr lang="fr-FR"/>
+              <a:t>VeloVille --- Cas Pratique --- Thomas Lerond</a:t>
+            </a:r>
             <a:endParaRPr lang="en-US" dirty="0"/>
           </a:p>
         </p:txBody>
@@ -4137,11 +4536,10 @@
           <a:bodyPr/>
           <a:lstStyle/>
           <a:p>
-            <a:fld id="{B61BEF0D-F0BB-DE4B-95CE-6DB70DBA9567}" type="datetimeFigureOut">
-              <a:rPr lang="en-US" dirty="0"/>
-              <a:pPr/>
-              <a:t>10/15/2026</a:t>
-            </a:fld>
+            <a:r>
+              <a:rPr lang="fr-FR"/>
+              <a:t>20/10/2026</a:t>
+            </a:r>
             <a:endParaRPr lang="en-US" dirty="0"/>
           </a:p>
         </p:txBody>
@@ -4161,6 +4559,10 @@
           <a:bodyPr/>
           <a:lstStyle/>
           <a:p>
+            <a:r>
+              <a:rPr lang="fr-FR"/>
+              <a:t>VeloVille --- Cas Pratique --- Thomas Lerond</a:t>
+            </a:r>
             <a:endParaRPr lang="en-US" dirty="0"/>
           </a:p>
         </p:txBody>
@@ -4417,11 +4819,10 @@
           <a:bodyPr/>
           <a:lstStyle/>
           <a:p>
-            <a:fld id="{B61BEF0D-F0BB-DE4B-95CE-6DB70DBA9567}" type="datetimeFigureOut">
-              <a:rPr lang="en-US" dirty="0"/>
-              <a:pPr/>
-              <a:t>10/15/2026</a:t>
-            </a:fld>
+            <a:r>
+              <a:rPr lang="fr-FR"/>
+              <a:t>20/10/2026</a:t>
+            </a:r>
             <a:endParaRPr lang="en-US" dirty="0"/>
           </a:p>
         </p:txBody>
@@ -4441,6 +4842,10 @@
           <a:bodyPr/>
           <a:lstStyle/>
           <a:p>
+            <a:r>
+              <a:rPr lang="fr-FR"/>
+              <a:t>VeloVille --- Cas Pratique --- Thomas Lerond</a:t>
+            </a:r>
             <a:endParaRPr lang="en-US" dirty="0"/>
           </a:p>
         </p:txBody>
@@ -4705,11 +5110,10 @@
           <a:bodyPr/>
           <a:lstStyle/>
           <a:p>
-            <a:fld id="{B61BEF0D-F0BB-DE4B-95CE-6DB70DBA9567}" type="datetimeFigureOut">
-              <a:rPr lang="en-US" dirty="0"/>
-              <a:pPr/>
-              <a:t>10/15/2026</a:t>
-            </a:fld>
+            <a:r>
+              <a:rPr lang="fr-FR"/>
+              <a:t>20/10/2026</a:t>
+            </a:r>
             <a:endParaRPr lang="en-US" dirty="0"/>
           </a:p>
         </p:txBody>
@@ -4734,6 +5138,10 @@
           <a:bodyPr/>
           <a:lstStyle/>
           <a:p>
+            <a:r>
+              <a:rPr lang="fr-FR"/>
+              <a:t>VeloVille --- Cas Pratique --- Thomas Lerond</a:t>
+            </a:r>
             <a:endParaRPr lang="en-US" dirty="0"/>
           </a:p>
         </p:txBody>
@@ -4933,11 +5341,10 @@
             </a:lvl1pPr>
           </a:lstStyle>
           <a:p>
-            <a:fld id="{B61BEF0D-F0BB-DE4B-95CE-6DB70DBA9567}" type="datetimeFigureOut">
-              <a:rPr lang="en-US" dirty="0"/>
-              <a:pPr/>
-              <a:t>10/15/2026</a:t>
-            </a:fld>
+            <a:r>
+              <a:rPr lang="fr-FR"/>
+              <a:t>20/10/2026</a:t>
+            </a:r>
             <a:endParaRPr lang="en-US" dirty="0"/>
           </a:p>
         </p:txBody>
@@ -4983,6 +5390,10 @@
             </a:lvl1pPr>
           </a:lstStyle>
           <a:p>
+            <a:r>
+              <a:rPr lang="fr-FR"/>
+              <a:t>VeloVille --- Cas Pratique --- Thomas Lerond</a:t>
+            </a:r>
             <a:endParaRPr lang="en-US" dirty="0"/>
           </a:p>
         </p:txBody>
@@ -5059,6 +5470,7 @@
     <p:sldLayoutId id="2147483658" r:id="rId16"/>
     <p:sldLayoutId id="2147483659" r:id="rId17"/>
   </p:sldLayoutIdLst>
+  <p:hf hdr="0"/>
   <p:txStyles>
     <p:titleStyle>
       <a:lvl1pPr algn="l" defTabSz="457200" rtl="0" eaLnBrk="1" latinLnBrk="0" hangingPunct="1">
@@ -5907,36 +6319,6 @@
       </p:pic>
       <p:pic>
         <p:nvPicPr>
-          <p:cNvPr id="7" name="Image 6">
-            <a:extLst>
-              <a:ext uri="{FF2B5EF4-FFF2-40B4-BE49-F238E27FC236}">
-                <a16:creationId xmlns:a16="http://schemas.microsoft.com/office/drawing/2014/main" id="{89FCE7EE-2BBB-3D98-282D-0771C30366C7}"/>
-              </a:ext>
-            </a:extLst>
-          </p:cNvPr>
-          <p:cNvPicPr>
-            <a:picLocks noChangeAspect="1"/>
-          </p:cNvPicPr>
-          <p:nvPr/>
-        </p:nvPicPr>
-        <p:blipFill>
-          <a:blip r:embed="rId3"/>
-          <a:stretch>
-            <a:fillRect/>
-          </a:stretch>
-        </p:blipFill>
-        <p:spPr>
-          <a:xfrm>
-            <a:off x="276792" y="2228556"/>
-            <a:ext cx="3871986" cy="4229690"/>
-          </a:xfrm>
-          <a:prstGeom prst="rect">
-            <a:avLst/>
-          </a:prstGeom>
-        </p:spPr>
-      </p:pic>
-      <p:pic>
-        <p:nvPicPr>
           <p:cNvPr id="9" name="Image 8">
             <a:extLst>
               <a:ext uri="{FF2B5EF4-FFF2-40B4-BE49-F238E27FC236}">
@@ -5950,7 +6332,7 @@
           <p:nvPr/>
         </p:nvPicPr>
         <p:blipFill>
-          <a:blip r:embed="rId4"/>
+          <a:blip r:embed="rId3"/>
           <a:stretch>
             <a:fillRect/>
           </a:stretch>
@@ -5980,7 +6362,7 @@
           <p:nvPr/>
         </p:nvPicPr>
         <p:blipFill>
-          <a:blip r:embed="rId5"/>
+          <a:blip r:embed="rId4"/>
           <a:stretch>
             <a:fillRect/>
           </a:stretch>
@@ -5989,6 +6371,291 @@
           <a:xfrm>
             <a:off x="8027408" y="1270520"/>
             <a:ext cx="4114917" cy="4316959"/>
+          </a:xfrm>
+          <a:prstGeom prst="rect">
+            <a:avLst/>
+          </a:prstGeom>
+        </p:spPr>
+      </p:pic>
+      <p:sp>
+        <p:nvSpPr>
+          <p:cNvPr id="3" name="Ellipse 2">
+            <a:extLst>
+              <a:ext uri="{FF2B5EF4-FFF2-40B4-BE49-F238E27FC236}">
+                <a16:creationId xmlns:a16="http://schemas.microsoft.com/office/drawing/2014/main" id="{721BE69B-50DC-B842-B307-DFCD494F8026}"/>
+              </a:ext>
+            </a:extLst>
+          </p:cNvPr>
+          <p:cNvSpPr/>
+          <p:nvPr/>
+        </p:nvSpPr>
+        <p:spPr>
+          <a:xfrm>
+            <a:off x="6659591" y="4321834"/>
+            <a:ext cx="250167" cy="267419"/>
+          </a:xfrm>
+          <a:prstGeom prst="ellipse">
+            <a:avLst/>
+          </a:prstGeom>
+          <a:noFill/>
+          <a:ln>
+            <a:solidFill>
+              <a:srgbClr val="FF0000"/>
+            </a:solidFill>
+          </a:ln>
+        </p:spPr>
+        <p:style>
+          <a:lnRef idx="2">
+            <a:schemeClr val="accent1">
+              <a:shade val="15000"/>
+            </a:schemeClr>
+          </a:lnRef>
+          <a:fillRef idx="1">
+            <a:schemeClr val="accent1"/>
+          </a:fillRef>
+          <a:effectRef idx="0">
+            <a:schemeClr val="accent1"/>
+          </a:effectRef>
+          <a:fontRef idx="minor">
+            <a:schemeClr val="lt1"/>
+          </a:fontRef>
+        </p:style>
+        <p:txBody>
+          <a:bodyPr rtlCol="0" anchor="ctr"/>
+          <a:lstStyle/>
+          <a:p>
+            <a:pPr algn="ctr"/>
+            <a:endParaRPr lang="fr-FR"/>
+          </a:p>
+        </p:txBody>
+      </p:sp>
+      <p:cxnSp>
+        <p:nvCxnSpPr>
+          <p:cNvPr id="6" name="Connecteur droit avec flèche 5">
+            <a:extLst>
+              <a:ext uri="{FF2B5EF4-FFF2-40B4-BE49-F238E27FC236}">
+                <a16:creationId xmlns:a16="http://schemas.microsoft.com/office/drawing/2014/main" id="{D90F4558-0B42-AECF-9136-9E1C43A09BE1}"/>
+              </a:ext>
+            </a:extLst>
+          </p:cNvPr>
+          <p:cNvCxnSpPr>
+            <a:endCxn id="3" idx="5"/>
+          </p:cNvCxnSpPr>
+          <p:nvPr/>
+        </p:nvCxnSpPr>
+        <p:spPr>
+          <a:xfrm flipH="1" flipV="1">
+            <a:off x="6873122" y="4550090"/>
+            <a:ext cx="1365104" cy="1350378"/>
+          </a:xfrm>
+          <a:prstGeom prst="straightConnector1">
+            <a:avLst/>
+          </a:prstGeom>
+          <a:ln w="38100">
+            <a:solidFill>
+              <a:srgbClr val="FF0000"/>
+            </a:solidFill>
+            <a:tailEnd type="triangle"/>
+          </a:ln>
+        </p:spPr>
+        <p:style>
+          <a:lnRef idx="1">
+            <a:schemeClr val="accent1"/>
+          </a:lnRef>
+          <a:fillRef idx="0">
+            <a:schemeClr val="accent1"/>
+          </a:fillRef>
+          <a:effectRef idx="0">
+            <a:schemeClr val="accent1"/>
+          </a:effectRef>
+          <a:fontRef idx="minor">
+            <a:schemeClr val="tx1"/>
+          </a:fontRef>
+        </p:style>
+      </p:cxnSp>
+      <p:sp>
+        <p:nvSpPr>
+          <p:cNvPr id="8" name="ZoneTexte 7">
+            <a:extLst>
+              <a:ext uri="{FF2B5EF4-FFF2-40B4-BE49-F238E27FC236}">
+                <a16:creationId xmlns:a16="http://schemas.microsoft.com/office/drawing/2014/main" id="{41B2E926-EBA3-843D-FD75-0DDBAC893DD1}"/>
+              </a:ext>
+            </a:extLst>
+          </p:cNvPr>
+          <p:cNvSpPr txBox="1"/>
+          <p:nvPr/>
+        </p:nvSpPr>
+        <p:spPr>
+          <a:xfrm>
+            <a:off x="8238226" y="5624422"/>
+            <a:ext cx="3676982" cy="415498"/>
+          </a:xfrm>
+          <a:prstGeom prst="rect">
+            <a:avLst/>
+          </a:prstGeom>
+          <a:noFill/>
+        </p:spPr>
+        <p:txBody>
+          <a:bodyPr wrap="square" rtlCol="0">
+            <a:spAutoFit/>
+          </a:bodyPr>
+          <a:lstStyle/>
+          <a:p>
+            <a:r>
+              <a:rPr lang="fr-FR" sz="1050" dirty="0"/>
+              <a:t>Je remarque en rédigeant ce petit bug d’affichage</a:t>
+            </a:r>
+          </a:p>
+          <a:p>
+            <a:r>
+              <a:rPr lang="fr-FR" sz="1050" dirty="0"/>
+              <a:t>Absent de la BDD</a:t>
+            </a:r>
+          </a:p>
+        </p:txBody>
+      </p:sp>
+      <p:pic>
+        <p:nvPicPr>
+          <p:cNvPr id="11" name="Image 10">
+            <a:extLst>
+              <a:ext uri="{FF2B5EF4-FFF2-40B4-BE49-F238E27FC236}">
+                <a16:creationId xmlns:a16="http://schemas.microsoft.com/office/drawing/2014/main" id="{2C8EB411-72BF-800E-1B49-38CD60B3FB0E}"/>
+              </a:ext>
+            </a:extLst>
+          </p:cNvPr>
+          <p:cNvPicPr>
+            <a:picLocks noChangeAspect="1"/>
+          </p:cNvPicPr>
+          <p:nvPr/>
+        </p:nvPicPr>
+        <p:blipFill>
+          <a:blip r:embed="rId5"/>
+          <a:stretch>
+            <a:fillRect/>
+          </a:stretch>
+        </p:blipFill>
+        <p:spPr>
+          <a:xfrm>
+            <a:off x="8312969" y="6068120"/>
+            <a:ext cx="1771897" cy="533474"/>
+          </a:xfrm>
+          <a:prstGeom prst="rect">
+            <a:avLst/>
+          </a:prstGeom>
+        </p:spPr>
+      </p:pic>
+      <p:sp>
+        <p:nvSpPr>
+          <p:cNvPr id="12" name="Espace réservé de la date 11">
+            <a:extLst>
+              <a:ext uri="{FF2B5EF4-FFF2-40B4-BE49-F238E27FC236}">
+                <a16:creationId xmlns:a16="http://schemas.microsoft.com/office/drawing/2014/main" id="{664C6126-CA83-A4AE-8E2E-35E3057464D1}"/>
+              </a:ext>
+            </a:extLst>
+          </p:cNvPr>
+          <p:cNvSpPr>
+            <a:spLocks noGrp="1"/>
+          </p:cNvSpPr>
+          <p:nvPr>
+            <p:ph type="dt" sz="half" idx="10"/>
+          </p:nvPr>
+        </p:nvSpPr>
+        <p:spPr/>
+        <p:txBody>
+          <a:bodyPr/>
+          <a:lstStyle/>
+          <a:p>
+            <a:r>
+              <a:rPr lang="fr-FR"/>
+              <a:t>20/10/2026</a:t>
+            </a:r>
+            <a:endParaRPr lang="en-US" dirty="0"/>
+          </a:p>
+        </p:txBody>
+      </p:sp>
+      <p:sp>
+        <p:nvSpPr>
+          <p:cNvPr id="14" name="Espace réservé du pied de page 13">
+            <a:extLst>
+              <a:ext uri="{FF2B5EF4-FFF2-40B4-BE49-F238E27FC236}">
+                <a16:creationId xmlns:a16="http://schemas.microsoft.com/office/drawing/2014/main" id="{362AC009-C5B2-2527-D417-5263CDD5111B}"/>
+              </a:ext>
+            </a:extLst>
+          </p:cNvPr>
+          <p:cNvSpPr>
+            <a:spLocks noGrp="1"/>
+          </p:cNvSpPr>
+          <p:nvPr>
+            <p:ph type="ftr" sz="quarter" idx="11"/>
+          </p:nvPr>
+        </p:nvSpPr>
+        <p:spPr/>
+        <p:txBody>
+          <a:bodyPr/>
+          <a:lstStyle/>
+          <a:p>
+            <a:r>
+              <a:rPr lang="fr-FR"/>
+              <a:t>VeloVille --- Cas Pratique --- Thomas Lerond</a:t>
+            </a:r>
+            <a:endParaRPr lang="en-US" dirty="0"/>
+          </a:p>
+        </p:txBody>
+      </p:sp>
+      <p:sp>
+        <p:nvSpPr>
+          <p:cNvPr id="15" name="Espace réservé du numéro de diapositive 14">
+            <a:extLst>
+              <a:ext uri="{FF2B5EF4-FFF2-40B4-BE49-F238E27FC236}">
+                <a16:creationId xmlns:a16="http://schemas.microsoft.com/office/drawing/2014/main" id="{210A9003-8C8F-3240-2A23-FAE1A8DC5E7C}"/>
+              </a:ext>
+            </a:extLst>
+          </p:cNvPr>
+          <p:cNvSpPr>
+            <a:spLocks noGrp="1"/>
+          </p:cNvSpPr>
+          <p:nvPr>
+            <p:ph type="sldNum" sz="quarter" idx="12"/>
+          </p:nvPr>
+        </p:nvSpPr>
+        <p:spPr/>
+        <p:txBody>
+          <a:bodyPr/>
+          <a:lstStyle/>
+          <a:p>
+            <a:fld id="{D57F1E4F-1CFF-5643-939E-217C01CDF565}" type="slidenum">
+              <a:rPr lang="en-US" smtClean="0"/>
+              <a:pPr/>
+              <a:t>10</a:t>
+            </a:fld>
+            <a:endParaRPr lang="en-US" dirty="0"/>
+          </a:p>
+        </p:txBody>
+      </p:sp>
+      <p:pic>
+        <p:nvPicPr>
+          <p:cNvPr id="7" name="Image 6">
+            <a:extLst>
+              <a:ext uri="{FF2B5EF4-FFF2-40B4-BE49-F238E27FC236}">
+                <a16:creationId xmlns:a16="http://schemas.microsoft.com/office/drawing/2014/main" id="{89FCE7EE-2BBB-3D98-282D-0771C30366C7}"/>
+              </a:ext>
+            </a:extLst>
+          </p:cNvPr>
+          <p:cNvPicPr>
+            <a:picLocks noChangeAspect="1"/>
+          </p:cNvPicPr>
+          <p:nvPr/>
+        </p:nvPicPr>
+        <p:blipFill>
+          <a:blip r:embed="rId6"/>
+          <a:stretch>
+            <a:fillRect/>
+          </a:stretch>
+        </p:blipFill>
+        <p:spPr>
+          <a:xfrm>
+            <a:off x="276792" y="2228556"/>
+            <a:ext cx="3871986" cy="4229690"/>
           </a:xfrm>
           <a:prstGeom prst="rect">
             <a:avLst/>
@@ -6085,36 +6752,6 @@
       </p:pic>
       <p:pic>
         <p:nvPicPr>
-          <p:cNvPr id="7" name="Image 6">
-            <a:extLst>
-              <a:ext uri="{FF2B5EF4-FFF2-40B4-BE49-F238E27FC236}">
-                <a16:creationId xmlns:a16="http://schemas.microsoft.com/office/drawing/2014/main" id="{5D77C742-E62D-E414-B9D1-C0AB16EB9A03}"/>
-              </a:ext>
-            </a:extLst>
-          </p:cNvPr>
-          <p:cNvPicPr>
-            <a:picLocks noChangeAspect="1"/>
-          </p:cNvPicPr>
-          <p:nvPr/>
-        </p:nvPicPr>
-        <p:blipFill>
-          <a:blip r:embed="rId3"/>
-          <a:stretch>
-            <a:fillRect/>
-          </a:stretch>
-        </p:blipFill>
-        <p:spPr>
-          <a:xfrm>
-            <a:off x="283703" y="4608999"/>
-            <a:ext cx="4918025" cy="2048226"/>
-          </a:xfrm>
-          <a:prstGeom prst="rect">
-            <a:avLst/>
-          </a:prstGeom>
-        </p:spPr>
-      </p:pic>
-      <p:pic>
-        <p:nvPicPr>
           <p:cNvPr id="11" name="Image 10">
             <a:extLst>
               <a:ext uri="{FF2B5EF4-FFF2-40B4-BE49-F238E27FC236}">
@@ -6128,7 +6765,7 @@
           <p:nvPr/>
         </p:nvPicPr>
         <p:blipFill>
-          <a:blip r:embed="rId4"/>
+          <a:blip r:embed="rId3"/>
           <a:stretch>
             <a:fillRect/>
           </a:stretch>
@@ -6158,7 +6795,7 @@
           <p:nvPr/>
         </p:nvPicPr>
         <p:blipFill>
-          <a:blip r:embed="rId5"/>
+          <a:blip r:embed="rId4"/>
           <a:stretch>
             <a:fillRect/>
           </a:stretch>
@@ -6250,6 +6887,124 @@
           </a:p>
         </p:txBody>
       </p:sp>
+      <p:sp>
+        <p:nvSpPr>
+          <p:cNvPr id="3" name="Espace réservé de la date 2">
+            <a:extLst>
+              <a:ext uri="{FF2B5EF4-FFF2-40B4-BE49-F238E27FC236}">
+                <a16:creationId xmlns:a16="http://schemas.microsoft.com/office/drawing/2014/main" id="{2FCD40BE-464D-F2FE-9BE0-3EAB820438AA}"/>
+              </a:ext>
+            </a:extLst>
+          </p:cNvPr>
+          <p:cNvSpPr>
+            <a:spLocks noGrp="1"/>
+          </p:cNvSpPr>
+          <p:nvPr>
+            <p:ph type="dt" sz="half" idx="10"/>
+          </p:nvPr>
+        </p:nvSpPr>
+        <p:spPr/>
+        <p:txBody>
+          <a:bodyPr/>
+          <a:lstStyle/>
+          <a:p>
+            <a:r>
+              <a:rPr lang="fr-FR"/>
+              <a:t>20/10/2026</a:t>
+            </a:r>
+            <a:endParaRPr lang="en-US" dirty="0"/>
+          </a:p>
+        </p:txBody>
+      </p:sp>
+      <p:sp>
+        <p:nvSpPr>
+          <p:cNvPr id="4" name="Espace réservé du pied de page 3">
+            <a:extLst>
+              <a:ext uri="{FF2B5EF4-FFF2-40B4-BE49-F238E27FC236}">
+                <a16:creationId xmlns:a16="http://schemas.microsoft.com/office/drawing/2014/main" id="{C5C45759-0058-DFBD-ED5C-9715ABD503B1}"/>
+              </a:ext>
+            </a:extLst>
+          </p:cNvPr>
+          <p:cNvSpPr>
+            <a:spLocks noGrp="1"/>
+          </p:cNvSpPr>
+          <p:nvPr>
+            <p:ph type="ftr" sz="quarter" idx="11"/>
+          </p:nvPr>
+        </p:nvSpPr>
+        <p:spPr/>
+        <p:txBody>
+          <a:bodyPr/>
+          <a:lstStyle/>
+          <a:p>
+            <a:r>
+              <a:rPr lang="fr-FR"/>
+              <a:t>VeloVille --- Cas Pratique --- Thomas Lerond</a:t>
+            </a:r>
+            <a:endParaRPr lang="en-US" dirty="0"/>
+          </a:p>
+        </p:txBody>
+      </p:sp>
+      <p:sp>
+        <p:nvSpPr>
+          <p:cNvPr id="6" name="Espace réservé du numéro de diapositive 5">
+            <a:extLst>
+              <a:ext uri="{FF2B5EF4-FFF2-40B4-BE49-F238E27FC236}">
+                <a16:creationId xmlns:a16="http://schemas.microsoft.com/office/drawing/2014/main" id="{C1CF7555-8EA7-39E8-4DBA-65537A547914}"/>
+              </a:ext>
+            </a:extLst>
+          </p:cNvPr>
+          <p:cNvSpPr>
+            <a:spLocks noGrp="1"/>
+          </p:cNvSpPr>
+          <p:nvPr>
+            <p:ph type="sldNum" sz="quarter" idx="12"/>
+          </p:nvPr>
+        </p:nvSpPr>
+        <p:spPr/>
+        <p:txBody>
+          <a:bodyPr/>
+          <a:lstStyle/>
+          <a:p>
+            <a:fld id="{D57F1E4F-1CFF-5643-939E-217C01CDF565}" type="slidenum">
+              <a:rPr lang="en-US" smtClean="0"/>
+              <a:pPr/>
+              <a:t>11</a:t>
+            </a:fld>
+            <a:endParaRPr lang="en-US" dirty="0"/>
+          </a:p>
+        </p:txBody>
+      </p:sp>
+      <p:pic>
+        <p:nvPicPr>
+          <p:cNvPr id="7" name="Image 6">
+            <a:extLst>
+              <a:ext uri="{FF2B5EF4-FFF2-40B4-BE49-F238E27FC236}">
+                <a16:creationId xmlns:a16="http://schemas.microsoft.com/office/drawing/2014/main" id="{5D77C742-E62D-E414-B9D1-C0AB16EB9A03}"/>
+              </a:ext>
+            </a:extLst>
+          </p:cNvPr>
+          <p:cNvPicPr>
+            <a:picLocks noChangeAspect="1"/>
+          </p:cNvPicPr>
+          <p:nvPr/>
+        </p:nvPicPr>
+        <p:blipFill>
+          <a:blip r:embed="rId5"/>
+          <a:stretch>
+            <a:fillRect/>
+          </a:stretch>
+        </p:blipFill>
+        <p:spPr>
+          <a:xfrm>
+            <a:off x="283703" y="4608999"/>
+            <a:ext cx="4918025" cy="2048226"/>
+          </a:xfrm>
+          <a:prstGeom prst="rect">
+            <a:avLst/>
+          </a:prstGeom>
+        </p:spPr>
+      </p:pic>
     </p:spTree>
     <p:extLst>
       <p:ext uri="{BB962C8B-B14F-4D97-AF65-F5344CB8AC3E}">
@@ -6352,10 +7107,10 @@
       </p:sp>
       <p:pic>
         <p:nvPicPr>
-          <p:cNvPr id="5" name="Image 4">
+          <p:cNvPr id="7" name="Image 6">
             <a:extLst>
               <a:ext uri="{FF2B5EF4-FFF2-40B4-BE49-F238E27FC236}">
-                <a16:creationId xmlns:a16="http://schemas.microsoft.com/office/drawing/2014/main" id="{DBAF9815-F584-C78D-0B3D-EB3BF6176A49}"/>
+                <a16:creationId xmlns:a16="http://schemas.microsoft.com/office/drawing/2014/main" id="{138B8A6A-7909-866F-ACC8-B80D210229BD}"/>
               </a:ext>
             </a:extLst>
           </p:cNvPr>
@@ -6372,20 +7127,108 @@
         </p:blipFill>
         <p:spPr>
           <a:xfrm>
-            <a:off x="7204525" y="1915063"/>
-            <a:ext cx="4538704" cy="4727275"/>
+            <a:off x="1280608" y="2242871"/>
+            <a:ext cx="4023664" cy="3536830"/>
           </a:xfrm>
           <a:prstGeom prst="rect">
             <a:avLst/>
           </a:prstGeom>
         </p:spPr>
       </p:pic>
+      <p:sp>
+        <p:nvSpPr>
+          <p:cNvPr id="4" name="Espace réservé de la date 3">
+            <a:extLst>
+              <a:ext uri="{FF2B5EF4-FFF2-40B4-BE49-F238E27FC236}">
+                <a16:creationId xmlns:a16="http://schemas.microsoft.com/office/drawing/2014/main" id="{7AED42C6-B772-B4F4-F91F-FB7A5771227A}"/>
+              </a:ext>
+            </a:extLst>
+          </p:cNvPr>
+          <p:cNvSpPr>
+            <a:spLocks noGrp="1"/>
+          </p:cNvSpPr>
+          <p:nvPr>
+            <p:ph type="dt" sz="half" idx="10"/>
+          </p:nvPr>
+        </p:nvSpPr>
+        <p:spPr/>
+        <p:txBody>
+          <a:bodyPr/>
+          <a:lstStyle/>
+          <a:p>
+            <a:r>
+              <a:rPr lang="fr-FR"/>
+              <a:t>20/10/2026</a:t>
+            </a:r>
+            <a:endParaRPr lang="en-US" dirty="0"/>
+          </a:p>
+        </p:txBody>
+      </p:sp>
+      <p:sp>
+        <p:nvSpPr>
+          <p:cNvPr id="6" name="Espace réservé du pied de page 5">
+            <a:extLst>
+              <a:ext uri="{FF2B5EF4-FFF2-40B4-BE49-F238E27FC236}">
+                <a16:creationId xmlns:a16="http://schemas.microsoft.com/office/drawing/2014/main" id="{0A9E087D-E04D-AEF9-2F3A-C3C912570526}"/>
+              </a:ext>
+            </a:extLst>
+          </p:cNvPr>
+          <p:cNvSpPr>
+            <a:spLocks noGrp="1"/>
+          </p:cNvSpPr>
+          <p:nvPr>
+            <p:ph type="ftr" sz="quarter" idx="11"/>
+          </p:nvPr>
+        </p:nvSpPr>
+        <p:spPr/>
+        <p:txBody>
+          <a:bodyPr/>
+          <a:lstStyle/>
+          <a:p>
+            <a:r>
+              <a:rPr lang="fr-FR"/>
+              <a:t>VeloVille --- Cas Pratique --- Thomas Lerond</a:t>
+            </a:r>
+            <a:endParaRPr lang="en-US" dirty="0"/>
+          </a:p>
+        </p:txBody>
+      </p:sp>
+      <p:sp>
+        <p:nvSpPr>
+          <p:cNvPr id="8" name="Espace réservé du numéro de diapositive 7">
+            <a:extLst>
+              <a:ext uri="{FF2B5EF4-FFF2-40B4-BE49-F238E27FC236}">
+                <a16:creationId xmlns:a16="http://schemas.microsoft.com/office/drawing/2014/main" id="{28006DA2-2276-E0DA-8858-BABAD67C7D0B}"/>
+              </a:ext>
+            </a:extLst>
+          </p:cNvPr>
+          <p:cNvSpPr>
+            <a:spLocks noGrp="1"/>
+          </p:cNvSpPr>
+          <p:nvPr>
+            <p:ph type="sldNum" sz="quarter" idx="12"/>
+          </p:nvPr>
+        </p:nvSpPr>
+        <p:spPr/>
+        <p:txBody>
+          <a:bodyPr/>
+          <a:lstStyle/>
+          <a:p>
+            <a:fld id="{D57F1E4F-1CFF-5643-939E-217C01CDF565}" type="slidenum">
+              <a:rPr lang="en-US" smtClean="0"/>
+              <a:pPr/>
+              <a:t>12</a:t>
+            </a:fld>
+            <a:endParaRPr lang="en-US" dirty="0"/>
+          </a:p>
+        </p:txBody>
+      </p:sp>
       <p:pic>
         <p:nvPicPr>
-          <p:cNvPr id="7" name="Image 6">
+          <p:cNvPr id="5" name="Image 4">
             <a:extLst>
               <a:ext uri="{FF2B5EF4-FFF2-40B4-BE49-F238E27FC236}">
-                <a16:creationId xmlns:a16="http://schemas.microsoft.com/office/drawing/2014/main" id="{138B8A6A-7909-866F-ACC8-B80D210229BD}"/>
+                <a16:creationId xmlns:a16="http://schemas.microsoft.com/office/drawing/2014/main" id="{DBAF9815-F584-C78D-0B3D-EB3BF6176A49}"/>
               </a:ext>
             </a:extLst>
           </p:cNvPr>
@@ -6402,8 +7245,8 @@
         </p:blipFill>
         <p:spPr>
           <a:xfrm>
-            <a:off x="1280608" y="2639683"/>
-            <a:ext cx="4023664" cy="3536830"/>
+            <a:off x="7204525" y="1915063"/>
+            <a:ext cx="4538704" cy="4727275"/>
           </a:xfrm>
           <a:prstGeom prst="rect">
             <a:avLst/>
@@ -6496,9 +7339,16 @@
             <p:ph idx="1"/>
           </p:nvPr>
         </p:nvSpPr>
-        <p:spPr/>
-        <p:txBody>
-          <a:bodyPr/>
+        <p:spPr>
+          <a:xfrm>
+            <a:off x="1141413" y="2666999"/>
+            <a:ext cx="4275976" cy="3124201"/>
+          </a:xfrm>
+        </p:spPr>
+        <p:txBody>
+          <a:bodyPr>
+            <a:normAutofit fontScale="77500" lnSpcReduction="20000"/>
+          </a:bodyPr>
           <a:lstStyle/>
           <a:p>
             <a:r>
@@ -6513,6 +7363,57 @@
             </a:r>
           </a:p>
           <a:p>
+            <a:pPr marL="457200" lvl="1" indent="0">
+              <a:buNone/>
+            </a:pPr>
+            <a:r>
+              <a:rPr lang="fr-FR" dirty="0"/>
+              <a:t>Pour le code, 3 sous-dossiers principaux : </a:t>
+            </a:r>
+          </a:p>
+          <a:p>
+            <a:pPr lvl="1"/>
+            <a:r>
+              <a:rPr lang="fr-FR" dirty="0"/>
+              <a:t>api </a:t>
+            </a:r>
+            <a:r>
+              <a:rPr lang="fr-FR" dirty="0">
+                <a:sym typeface="Wingdings" panose="05000000000000000000" pitchFamily="2" charset="2"/>
+              </a:rPr>
+              <a:t> backend</a:t>
+            </a:r>
+          </a:p>
+          <a:p>
+            <a:pPr lvl="1"/>
+            <a:r>
+              <a:rPr lang="fr-FR" dirty="0"/>
+              <a:t>front </a:t>
+            </a:r>
+            <a:r>
+              <a:rPr lang="fr-FR" dirty="0">
+                <a:sym typeface="Wingdings" panose="05000000000000000000" pitchFamily="2" charset="2"/>
+              </a:rPr>
+              <a:t> frontend</a:t>
+            </a:r>
+          </a:p>
+          <a:p>
+            <a:pPr lvl="1"/>
+            <a:r>
+              <a:rPr lang="fr-FR" dirty="0">
+                <a:sym typeface="Wingdings" panose="05000000000000000000" pitchFamily="2" charset="2"/>
+              </a:rPr>
+              <a:t>scripts  script d’importation des csv</a:t>
+            </a:r>
+            <a:endParaRPr lang="fr-FR" b="0" i="0" dirty="0">
+              <a:solidFill>
+                <a:srgbClr val="BBBEBF"/>
+              </a:solidFill>
+              <a:effectLst/>
+              <a:latin typeface="-apple-system"/>
+            </a:endParaRPr>
+          </a:p>
+          <a:p>
             <a:r>
               <a:rPr lang="fr-FR" b="0" i="0" dirty="0">
                 <a:solidFill>
@@ -6525,6 +7426,40 @@
             </a:r>
           </a:p>
           <a:p>
+            <a:pPr marL="0" indent="0">
+              <a:buNone/>
+            </a:pPr>
+            <a:r>
+              <a:rPr lang="fr-FR" b="0" i="0" dirty="0">
+                <a:solidFill>
+                  <a:srgbClr val="BBBEBF"/>
+                </a:solidFill>
+                <a:effectLst/>
+                <a:latin typeface="-apple-system"/>
+              </a:rPr>
+              <a:t>	</a:t>
+            </a:r>
+            <a:r>
+              <a:rPr lang="fr-FR" dirty="0"/>
+              <a:t>Un dossier de tests à part, rapport </a:t>
+            </a:r>
+            <a:r>
+              <a:rPr lang="fr-FR" dirty="0" err="1"/>
+              <a:t>automtisé</a:t>
+            </a:r>
+            <a:r>
+              <a:rPr lang="fr-FR" dirty="0"/>
+              <a:t> en html</a:t>
+            </a:r>
+            <a:endParaRPr lang="fr-FR" b="0" i="0" dirty="0">
+              <a:solidFill>
+                <a:srgbClr val="BBBEBF"/>
+              </a:solidFill>
+              <a:effectLst/>
+              <a:latin typeface="-apple-system"/>
+            </a:endParaRPr>
+          </a:p>
+          <a:p>
             <a:r>
               <a:rPr lang="fr-FR" b="0" i="0" dirty="0">
                 <a:solidFill>
@@ -6537,8 +7472,484 @@
             </a:r>
           </a:p>
           <a:p>
-            <a:r>
-              <a:rPr lang="fr-FR" b="0" i="0" dirty="0">
+            <a:pPr marL="0" indent="0">
+              <a:buNone/>
+            </a:pPr>
+            <a:r>
+              <a:rPr lang="fr-FR" dirty="0">
+                <a:solidFill>
+                  <a:srgbClr val="BBBEBF"/>
+                </a:solidFill>
+                <a:effectLst/>
+                <a:latin typeface="-apple-system"/>
+              </a:rPr>
+              <a:t>	2 profils différents avec des accès différents</a:t>
+            </a:r>
+            <a:endParaRPr lang="fr-FR" b="0" i="0" dirty="0">
+              <a:solidFill>
+                <a:srgbClr val="BBBEBF"/>
+              </a:solidFill>
+              <a:effectLst/>
+              <a:latin typeface="-apple-system"/>
+            </a:endParaRPr>
+          </a:p>
+        </p:txBody>
+      </p:sp>
+      <p:sp>
+        <p:nvSpPr>
+          <p:cNvPr id="5" name="Espace réservé du contenu 2">
+            <a:extLst>
+              <a:ext uri="{FF2B5EF4-FFF2-40B4-BE49-F238E27FC236}">
+                <a16:creationId xmlns:a16="http://schemas.microsoft.com/office/drawing/2014/main" id="{DE81B500-AC26-A54A-575F-16C8DE98CE33}"/>
+              </a:ext>
+            </a:extLst>
+          </p:cNvPr>
+          <p:cNvSpPr txBox="1">
+            <a:spLocks/>
+          </p:cNvSpPr>
+          <p:nvPr/>
+        </p:nvSpPr>
+        <p:spPr>
+          <a:xfrm>
+            <a:off x="5762296" y="2666998"/>
+            <a:ext cx="4275976" cy="3124201"/>
+          </a:xfrm>
+          <a:prstGeom prst="rect">
+            <a:avLst/>
+          </a:prstGeom>
+        </p:spPr>
+        <p:txBody>
+          <a:bodyPr vert="horz" lIns="91440" tIns="45720" rIns="91440" bIns="45720" rtlCol="0" anchor="ctr">
+            <a:normAutofit fontScale="92500"/>
+          </a:bodyPr>
+          <a:lstStyle>
+            <a:lvl1pPr marL="285750" indent="-285750" algn="l" defTabSz="457200" rtl="0" eaLnBrk="1" latinLnBrk="0" hangingPunct="1">
+              <a:spcBef>
+                <a:spcPct val="20000"/>
+              </a:spcBef>
+              <a:spcAft>
+                <a:spcPts val="600"/>
+              </a:spcAft>
+              <a:buClr>
+                <a:schemeClr val="tx1"/>
+              </a:buClr>
+              <a:buSzPct val="100000"/>
+              <a:buFont typeface="Arial"/>
+              <a:buChar char="•"/>
+              <a:defRPr sz="2000" kern="1200" cap="none" baseline="0">
+                <a:gradFill flip="none" rotWithShape="1">
+                  <a:gsLst>
+                    <a:gs pos="0">
+                      <a:schemeClr val="tx1"/>
+                    </a:gs>
+                    <a:gs pos="100000">
+                      <a:schemeClr val="tx1">
+                        <a:lumMod val="75000"/>
+                      </a:schemeClr>
+                    </a:gs>
+                  </a:gsLst>
+                  <a:lin ang="5580000" scaled="0"/>
+                  <a:tileRect/>
+                </a:gradFill>
+                <a:effectLst>
+                  <a:glow rad="38100">
+                    <a:schemeClr val="bg1">
+                      <a:lumMod val="50000"/>
+                      <a:lumOff val="50000"/>
+                      <a:alpha val="20000"/>
+                    </a:schemeClr>
+                  </a:glow>
+                  <a:outerShdw blurRad="44450" dist="12700" dir="13860000" algn="tl" rotWithShape="0">
+                    <a:srgbClr val="000000">
+                      <a:alpha val="20000"/>
+                    </a:srgbClr>
+                  </a:outerShdw>
+                </a:effectLst>
+                <a:latin typeface="+mn-lt"/>
+                <a:ea typeface="+mn-ea"/>
+                <a:cs typeface="+mn-cs"/>
+              </a:defRPr>
+            </a:lvl1pPr>
+            <a:lvl2pPr marL="742950" indent="-285750" algn="l" defTabSz="457200" rtl="0" eaLnBrk="1" latinLnBrk="0" hangingPunct="1">
+              <a:spcBef>
+                <a:spcPct val="20000"/>
+              </a:spcBef>
+              <a:spcAft>
+                <a:spcPts val="600"/>
+              </a:spcAft>
+              <a:buClr>
+                <a:schemeClr val="tx1"/>
+              </a:buClr>
+              <a:buSzPct val="100000"/>
+              <a:buFont typeface="Arial"/>
+              <a:buChar char="•"/>
+              <a:defRPr sz="1800" kern="1200" cap="none" baseline="0">
+                <a:gradFill flip="none" rotWithShape="1">
+                  <a:gsLst>
+                    <a:gs pos="0">
+                      <a:schemeClr val="tx1"/>
+                    </a:gs>
+                    <a:gs pos="100000">
+                      <a:schemeClr val="tx1">
+                        <a:lumMod val="75000"/>
+                      </a:schemeClr>
+                    </a:gs>
+                  </a:gsLst>
+                  <a:lin ang="5580000" scaled="0"/>
+                  <a:tileRect/>
+                </a:gradFill>
+                <a:effectLst>
+                  <a:glow rad="38100">
+                    <a:schemeClr val="bg1">
+                      <a:lumMod val="50000"/>
+                      <a:lumOff val="50000"/>
+                      <a:alpha val="20000"/>
+                    </a:schemeClr>
+                  </a:glow>
+                  <a:outerShdw blurRad="44450" dist="12700" dir="13860000" algn="tl" rotWithShape="0">
+                    <a:srgbClr val="000000">
+                      <a:alpha val="20000"/>
+                    </a:srgbClr>
+                  </a:outerShdw>
+                </a:effectLst>
+                <a:latin typeface="+mn-lt"/>
+                <a:ea typeface="+mn-ea"/>
+                <a:cs typeface="+mn-cs"/>
+              </a:defRPr>
+            </a:lvl2pPr>
+            <a:lvl3pPr marL="1200150" indent="-285750" algn="l" defTabSz="457200" rtl="0" eaLnBrk="1" latinLnBrk="0" hangingPunct="1">
+              <a:spcBef>
+                <a:spcPct val="20000"/>
+              </a:spcBef>
+              <a:spcAft>
+                <a:spcPts val="600"/>
+              </a:spcAft>
+              <a:buClr>
+                <a:schemeClr val="tx1"/>
+              </a:buClr>
+              <a:buSzPct val="100000"/>
+              <a:buFont typeface="Arial"/>
+              <a:buChar char="•"/>
+              <a:defRPr sz="1600" kern="1200" cap="none" baseline="0">
+                <a:gradFill flip="none" rotWithShape="1">
+                  <a:gsLst>
+                    <a:gs pos="0">
+                      <a:schemeClr val="tx1"/>
+                    </a:gs>
+                    <a:gs pos="100000">
+                      <a:schemeClr val="tx1">
+                        <a:lumMod val="75000"/>
+                      </a:schemeClr>
+                    </a:gs>
+                  </a:gsLst>
+                  <a:lin ang="5580000" scaled="0"/>
+                  <a:tileRect/>
+                </a:gradFill>
+                <a:effectLst>
+                  <a:glow rad="38100">
+                    <a:schemeClr val="bg1">
+                      <a:lumMod val="50000"/>
+                      <a:lumOff val="50000"/>
+                      <a:alpha val="20000"/>
+                    </a:schemeClr>
+                  </a:glow>
+                  <a:outerShdw blurRad="44450" dist="12700" dir="13860000" algn="tl" rotWithShape="0">
+                    <a:srgbClr val="000000">
+                      <a:alpha val="20000"/>
+                    </a:srgbClr>
+                  </a:outerShdw>
+                </a:effectLst>
+                <a:latin typeface="+mn-lt"/>
+                <a:ea typeface="+mn-ea"/>
+                <a:cs typeface="+mn-cs"/>
+              </a:defRPr>
+            </a:lvl3pPr>
+            <a:lvl4pPr marL="1543050" indent="-171450" algn="l" defTabSz="457200" rtl="0" eaLnBrk="1" latinLnBrk="0" hangingPunct="1">
+              <a:spcBef>
+                <a:spcPct val="20000"/>
+              </a:spcBef>
+              <a:spcAft>
+                <a:spcPts val="600"/>
+              </a:spcAft>
+              <a:buClr>
+                <a:schemeClr val="tx1"/>
+              </a:buClr>
+              <a:buSzPct val="100000"/>
+              <a:buFont typeface="Arial"/>
+              <a:buChar char="•"/>
+              <a:defRPr sz="1400" kern="1200" cap="none" baseline="0">
+                <a:gradFill flip="none" rotWithShape="1">
+                  <a:gsLst>
+                    <a:gs pos="0">
+                      <a:schemeClr val="tx1"/>
+                    </a:gs>
+                    <a:gs pos="100000">
+                      <a:schemeClr val="tx1">
+                        <a:lumMod val="75000"/>
+                      </a:schemeClr>
+                    </a:gs>
+                  </a:gsLst>
+                  <a:lin ang="5580000" scaled="0"/>
+                  <a:tileRect/>
+                </a:gradFill>
+                <a:effectLst>
+                  <a:glow rad="38100">
+                    <a:schemeClr val="bg1">
+                      <a:lumMod val="50000"/>
+                      <a:lumOff val="50000"/>
+                      <a:alpha val="20000"/>
+                    </a:schemeClr>
+                  </a:glow>
+                  <a:outerShdw blurRad="44450" dist="12700" dir="13860000" algn="tl" rotWithShape="0">
+                    <a:srgbClr val="000000">
+                      <a:alpha val="20000"/>
+                    </a:srgbClr>
+                  </a:outerShdw>
+                </a:effectLst>
+                <a:latin typeface="+mn-lt"/>
+                <a:ea typeface="+mn-ea"/>
+                <a:cs typeface="+mn-cs"/>
+              </a:defRPr>
+            </a:lvl4pPr>
+            <a:lvl5pPr marL="2000250" indent="-171450" algn="l" defTabSz="457200" rtl="0" eaLnBrk="1" latinLnBrk="0" hangingPunct="1">
+              <a:spcBef>
+                <a:spcPct val="20000"/>
+              </a:spcBef>
+              <a:spcAft>
+                <a:spcPts val="600"/>
+              </a:spcAft>
+              <a:buClr>
+                <a:schemeClr val="tx1"/>
+              </a:buClr>
+              <a:buSzPct val="100000"/>
+              <a:buFont typeface="Arial"/>
+              <a:buChar char="•"/>
+              <a:defRPr sz="1400" kern="1200" cap="none" baseline="0">
+                <a:gradFill flip="none" rotWithShape="1">
+                  <a:gsLst>
+                    <a:gs pos="0">
+                      <a:schemeClr val="tx1"/>
+                    </a:gs>
+                    <a:gs pos="100000">
+                      <a:schemeClr val="tx1">
+                        <a:lumMod val="75000"/>
+                      </a:schemeClr>
+                    </a:gs>
+                  </a:gsLst>
+                  <a:lin ang="5580000" scaled="0"/>
+                  <a:tileRect/>
+                </a:gradFill>
+                <a:effectLst>
+                  <a:glow rad="38100">
+                    <a:schemeClr val="bg1">
+                      <a:lumMod val="50000"/>
+                      <a:lumOff val="50000"/>
+                      <a:alpha val="20000"/>
+                    </a:schemeClr>
+                  </a:glow>
+                  <a:outerShdw blurRad="44450" dist="12700" dir="13860000" algn="tl" rotWithShape="0">
+                    <a:srgbClr val="000000">
+                      <a:alpha val="20000"/>
+                    </a:srgbClr>
+                  </a:outerShdw>
+                </a:effectLst>
+                <a:latin typeface="+mn-lt"/>
+                <a:ea typeface="+mn-ea"/>
+                <a:cs typeface="+mn-cs"/>
+              </a:defRPr>
+            </a:lvl5pPr>
+            <a:lvl6pPr marL="2514600" indent="-228600" algn="l" defTabSz="457200" rtl="0" eaLnBrk="1" latinLnBrk="0" hangingPunct="1">
+              <a:spcBef>
+                <a:spcPct val="20000"/>
+              </a:spcBef>
+              <a:spcAft>
+                <a:spcPts val="600"/>
+              </a:spcAft>
+              <a:buClr>
+                <a:schemeClr val="tx1"/>
+              </a:buClr>
+              <a:buSzPct val="100000"/>
+              <a:buFont typeface="Arial"/>
+              <a:buChar char="•"/>
+              <a:defRPr sz="1200" kern="1200" cap="small">
+                <a:gradFill flip="none" rotWithShape="1">
+                  <a:gsLst>
+                    <a:gs pos="0">
+                      <a:schemeClr val="tx1"/>
+                    </a:gs>
+                    <a:gs pos="100000">
+                      <a:schemeClr val="tx1">
+                        <a:lumMod val="75000"/>
+                      </a:schemeClr>
+                    </a:gs>
+                  </a:gsLst>
+                  <a:lin ang="5580000" scaled="0"/>
+                  <a:tileRect/>
+                </a:gradFill>
+                <a:effectLst>
+                  <a:glow rad="38100">
+                    <a:schemeClr val="bg1">
+                      <a:lumMod val="50000"/>
+                      <a:lumOff val="50000"/>
+                      <a:alpha val="20000"/>
+                    </a:schemeClr>
+                  </a:glow>
+                  <a:outerShdw blurRad="44450" dist="12700" dir="13860000" algn="tl" rotWithShape="0">
+                    <a:srgbClr val="000000">
+                      <a:alpha val="20000"/>
+                    </a:srgbClr>
+                  </a:outerShdw>
+                </a:effectLst>
+                <a:latin typeface="+mn-lt"/>
+                <a:ea typeface="+mn-ea"/>
+                <a:cs typeface="+mn-cs"/>
+              </a:defRPr>
+            </a:lvl6pPr>
+            <a:lvl7pPr marL="2971800" indent="-228600" algn="l" defTabSz="457200" rtl="0" eaLnBrk="1" latinLnBrk="0" hangingPunct="1">
+              <a:spcBef>
+                <a:spcPct val="20000"/>
+              </a:spcBef>
+              <a:spcAft>
+                <a:spcPts val="600"/>
+              </a:spcAft>
+              <a:buClr>
+                <a:schemeClr val="tx1"/>
+              </a:buClr>
+              <a:buSzPct val="100000"/>
+              <a:buFont typeface="Arial"/>
+              <a:buChar char="•"/>
+              <a:defRPr sz="1200" kern="1200" cap="small">
+                <a:gradFill flip="none" rotWithShape="1">
+                  <a:gsLst>
+                    <a:gs pos="0">
+                      <a:schemeClr val="tx1"/>
+                    </a:gs>
+                    <a:gs pos="100000">
+                      <a:schemeClr val="tx1">
+                        <a:lumMod val="75000"/>
+                      </a:schemeClr>
+                    </a:gs>
+                  </a:gsLst>
+                  <a:lin ang="5580000" scaled="0"/>
+                  <a:tileRect/>
+                </a:gradFill>
+                <a:effectLst>
+                  <a:glow rad="38100">
+                    <a:schemeClr val="bg1">
+                      <a:lumMod val="50000"/>
+                      <a:lumOff val="50000"/>
+                      <a:alpha val="20000"/>
+                    </a:schemeClr>
+                  </a:glow>
+                  <a:outerShdw blurRad="44450" dist="12700" dir="13860000" algn="tl" rotWithShape="0">
+                    <a:srgbClr val="000000">
+                      <a:alpha val="20000"/>
+                    </a:srgbClr>
+                  </a:outerShdw>
+                </a:effectLst>
+                <a:latin typeface="+mn-lt"/>
+                <a:ea typeface="+mn-ea"/>
+                <a:cs typeface="+mn-cs"/>
+              </a:defRPr>
+            </a:lvl7pPr>
+            <a:lvl8pPr marL="3429000" indent="-228600" algn="l" defTabSz="457200" rtl="0" eaLnBrk="1" latinLnBrk="0" hangingPunct="1">
+              <a:spcBef>
+                <a:spcPct val="20000"/>
+              </a:spcBef>
+              <a:spcAft>
+                <a:spcPts val="600"/>
+              </a:spcAft>
+              <a:buClr>
+                <a:schemeClr val="tx1"/>
+              </a:buClr>
+              <a:buSzPct val="100000"/>
+              <a:buFont typeface="Arial"/>
+              <a:buChar char="•"/>
+              <a:defRPr sz="1200" kern="1200" cap="small">
+                <a:gradFill flip="none" rotWithShape="1">
+                  <a:gsLst>
+                    <a:gs pos="0">
+                      <a:schemeClr val="tx1"/>
+                    </a:gs>
+                    <a:gs pos="100000">
+                      <a:schemeClr val="tx1">
+                        <a:lumMod val="75000"/>
+                      </a:schemeClr>
+                    </a:gs>
+                  </a:gsLst>
+                  <a:lin ang="5580000" scaled="0"/>
+                  <a:tileRect/>
+                </a:gradFill>
+                <a:effectLst>
+                  <a:glow rad="38100">
+                    <a:schemeClr val="bg1">
+                      <a:lumMod val="50000"/>
+                      <a:lumOff val="50000"/>
+                      <a:alpha val="20000"/>
+                    </a:schemeClr>
+                  </a:glow>
+                  <a:outerShdw blurRad="44450" dist="12700" dir="13860000" algn="tl" rotWithShape="0">
+                    <a:srgbClr val="000000">
+                      <a:alpha val="20000"/>
+                    </a:srgbClr>
+                  </a:outerShdw>
+                </a:effectLst>
+                <a:latin typeface="+mn-lt"/>
+                <a:ea typeface="+mn-ea"/>
+                <a:cs typeface="+mn-cs"/>
+              </a:defRPr>
+            </a:lvl8pPr>
+            <a:lvl9pPr marL="3886200" indent="-228600" algn="l" defTabSz="457200" rtl="0" eaLnBrk="1" latinLnBrk="0" hangingPunct="1">
+              <a:spcBef>
+                <a:spcPct val="20000"/>
+              </a:spcBef>
+              <a:spcAft>
+                <a:spcPts val="600"/>
+              </a:spcAft>
+              <a:buClr>
+                <a:schemeClr val="tx1"/>
+              </a:buClr>
+              <a:buSzPct val="100000"/>
+              <a:buFont typeface="Arial"/>
+              <a:buChar char="•"/>
+              <a:defRPr sz="1200" kern="1200" cap="small">
+                <a:gradFill flip="none" rotWithShape="1">
+                  <a:gsLst>
+                    <a:gs pos="0">
+                      <a:schemeClr val="tx1"/>
+                    </a:gs>
+                    <a:gs pos="100000">
+                      <a:schemeClr val="tx1">
+                        <a:lumMod val="75000"/>
+                      </a:schemeClr>
+                    </a:gs>
+                  </a:gsLst>
+                  <a:lin ang="5580000" scaled="0"/>
+                  <a:tileRect/>
+                </a:gradFill>
+                <a:effectLst>
+                  <a:glow rad="38100">
+                    <a:schemeClr val="bg1">
+                      <a:lumMod val="50000"/>
+                      <a:lumOff val="50000"/>
+                      <a:alpha val="20000"/>
+                    </a:schemeClr>
+                  </a:glow>
+                  <a:outerShdw blurRad="44450" dist="12700" dir="13860000" algn="tl" rotWithShape="0">
+                    <a:srgbClr val="000000">
+                      <a:alpha val="20000"/>
+                    </a:srgbClr>
+                  </a:outerShdw>
+                </a:effectLst>
+                <a:latin typeface="+mn-lt"/>
+                <a:ea typeface="+mn-ea"/>
+                <a:cs typeface="+mn-cs"/>
+              </a:defRPr>
+            </a:lvl9pPr>
+          </a:lstStyle>
+          <a:p>
+            <a:r>
+              <a:rPr lang="fr-FR" dirty="0">
                 <a:solidFill>
                   <a:srgbClr val="BBBEBF"/>
                 </a:solidFill>
@@ -6549,20 +7960,38 @@
             </a:r>
           </a:p>
           <a:p>
-            <a:r>
-              <a:rPr lang="fr-FR" b="0" i="0" dirty="0">
+            <a:pPr marL="0" indent="0">
+              <a:buNone/>
+            </a:pPr>
+            <a:r>
+              <a:rPr lang="fr-FR" dirty="0">
                 <a:solidFill>
                   <a:srgbClr val="BBBEBF"/>
                 </a:solidFill>
                 <a:effectLst/>
                 <a:latin typeface="-apple-system"/>
               </a:rPr>
-              <a:t>Historique Git </a:t>
-            </a:r>
-          </a:p>
-          <a:p>
-            <a:r>
-              <a:rPr lang="fr-FR" b="0" i="0" dirty="0">
+              <a:t>	frontend qui répond sur demande, pas en continu</a:t>
+            </a:r>
+          </a:p>
+          <a:p>
+            <a:pPr marL="0" indent="0">
+              <a:buNone/>
+            </a:pPr>
+            <a:r>
+              <a:rPr lang="fr-FR" dirty="0">
+                <a:solidFill>
+                  <a:srgbClr val="BBBEBF"/>
+                </a:solidFill>
+                <a:effectLst/>
+                <a:latin typeface="-apple-system"/>
+              </a:rPr>
+              <a:t>	pagination à base de requêtes SQL pour ne pas charger la BDD entière</a:t>
+            </a:r>
+          </a:p>
+          <a:p>
+            <a:r>
+              <a:rPr lang="fr-FR" dirty="0">
                 <a:solidFill>
                   <a:srgbClr val="BBBEBF"/>
                 </a:solidFill>
@@ -6573,20 +8002,185 @@
             </a:r>
           </a:p>
           <a:p>
-            <a:r>
-              <a:rPr lang="fr-FR" b="0" i="0" dirty="0">
+            <a:pPr marL="0" indent="0">
+              <a:buNone/>
+            </a:pPr>
+            <a:r>
+              <a:rPr lang="fr-FR" dirty="0">
                 <a:solidFill>
                   <a:srgbClr val="BBBEBF"/>
                 </a:solidFill>
                 <a:effectLst/>
                 <a:latin typeface="-apple-system"/>
               </a:rPr>
-              <a:t>Corrections</a:t>
-            </a:r>
-            <a:endParaRPr lang="fr-FR" dirty="0"/>
-          </a:p>
-        </p:txBody>
-      </p:sp>
+              <a:t>	bilan des recettes sur la ver.1.0.0</a:t>
+            </a:r>
+          </a:p>
+          <a:p>
+            <a:pPr marL="0" indent="0">
+              <a:buNone/>
+            </a:pPr>
+            <a:r>
+              <a:rPr lang="fr-FR" dirty="0">
+                <a:solidFill>
+                  <a:srgbClr val="BBBEBF"/>
+                </a:solidFill>
+                <a:effectLst/>
+                <a:latin typeface="-apple-system"/>
+              </a:rPr>
+              <a:t>	corrections en cours sur la ver 1.0.1</a:t>
+            </a:r>
+          </a:p>
+        </p:txBody>
+      </p:sp>
+      <p:pic>
+        <p:nvPicPr>
+          <p:cNvPr id="7" name="Image 6">
+            <a:extLst>
+              <a:ext uri="{FF2B5EF4-FFF2-40B4-BE49-F238E27FC236}">
+                <a16:creationId xmlns:a16="http://schemas.microsoft.com/office/drawing/2014/main" id="{D21B6D07-BE24-5C7D-FE34-71C6F5ABDC59}"/>
+              </a:ext>
+            </a:extLst>
+          </p:cNvPr>
+          <p:cNvPicPr>
+            <a:picLocks noChangeAspect="1"/>
+          </p:cNvPicPr>
+          <p:nvPr/>
+        </p:nvPicPr>
+        <p:blipFill>
+          <a:blip r:embed="rId2"/>
+          <a:stretch>
+            <a:fillRect/>
+          </a:stretch>
+        </p:blipFill>
+        <p:spPr>
+          <a:xfrm>
+            <a:off x="7705037" y="1104680"/>
+            <a:ext cx="2905530" cy="1562318"/>
+          </a:xfrm>
+          <a:prstGeom prst="rect">
+            <a:avLst/>
+          </a:prstGeom>
+        </p:spPr>
+      </p:pic>
+      <p:sp>
+        <p:nvSpPr>
+          <p:cNvPr id="8" name="Espace réservé de la date 7">
+            <a:extLst>
+              <a:ext uri="{FF2B5EF4-FFF2-40B4-BE49-F238E27FC236}">
+                <a16:creationId xmlns:a16="http://schemas.microsoft.com/office/drawing/2014/main" id="{84B18EC2-E859-FEB7-D809-D4EA6B88C42F}"/>
+              </a:ext>
+            </a:extLst>
+          </p:cNvPr>
+          <p:cNvSpPr>
+            <a:spLocks noGrp="1"/>
+          </p:cNvSpPr>
+          <p:nvPr>
+            <p:ph type="dt" sz="half" idx="10"/>
+          </p:nvPr>
+        </p:nvSpPr>
+        <p:spPr/>
+        <p:txBody>
+          <a:bodyPr/>
+          <a:lstStyle/>
+          <a:p>
+            <a:r>
+              <a:rPr lang="fr-FR"/>
+              <a:t>20/10/2026</a:t>
+            </a:r>
+            <a:endParaRPr lang="en-US" dirty="0"/>
+          </a:p>
+        </p:txBody>
+      </p:sp>
+      <p:sp>
+        <p:nvSpPr>
+          <p:cNvPr id="9" name="Espace réservé du pied de page 8">
+            <a:extLst>
+              <a:ext uri="{FF2B5EF4-FFF2-40B4-BE49-F238E27FC236}">
+                <a16:creationId xmlns:a16="http://schemas.microsoft.com/office/drawing/2014/main" id="{FD7492D2-825D-9B5E-8ED6-0BBFD0F84984}"/>
+              </a:ext>
+            </a:extLst>
+          </p:cNvPr>
+          <p:cNvSpPr>
+            <a:spLocks noGrp="1"/>
+          </p:cNvSpPr>
+          <p:nvPr>
+            <p:ph type="ftr" sz="quarter" idx="11"/>
+          </p:nvPr>
+        </p:nvSpPr>
+        <p:spPr/>
+        <p:txBody>
+          <a:bodyPr/>
+          <a:lstStyle/>
+          <a:p>
+            <a:r>
+              <a:rPr lang="fr-FR"/>
+              <a:t>VeloVille --- Cas Pratique --- Thomas Lerond</a:t>
+            </a:r>
+            <a:endParaRPr lang="en-US" dirty="0"/>
+          </a:p>
+        </p:txBody>
+      </p:sp>
+      <p:sp>
+        <p:nvSpPr>
+          <p:cNvPr id="10" name="Espace réservé du numéro de diapositive 9">
+            <a:extLst>
+              <a:ext uri="{FF2B5EF4-FFF2-40B4-BE49-F238E27FC236}">
+                <a16:creationId xmlns:a16="http://schemas.microsoft.com/office/drawing/2014/main" id="{AD477FA6-578D-4B43-895C-8A4003365A79}"/>
+              </a:ext>
+            </a:extLst>
+          </p:cNvPr>
+          <p:cNvSpPr>
+            <a:spLocks noGrp="1"/>
+          </p:cNvSpPr>
+          <p:nvPr>
+            <p:ph type="sldNum" sz="quarter" idx="12"/>
+          </p:nvPr>
+        </p:nvSpPr>
+        <p:spPr/>
+        <p:txBody>
+          <a:bodyPr/>
+          <a:lstStyle/>
+          <a:p>
+            <a:fld id="{D57F1E4F-1CFF-5643-939E-217C01CDF565}" type="slidenum">
+              <a:rPr lang="en-US" smtClean="0"/>
+              <a:pPr/>
+              <a:t>13</a:t>
+            </a:fld>
+            <a:endParaRPr lang="en-US" dirty="0"/>
+          </a:p>
+        </p:txBody>
+      </p:sp>
+      <p:pic>
+        <p:nvPicPr>
+          <p:cNvPr id="4" name="Image 3">
+            <a:extLst>
+              <a:ext uri="{FF2B5EF4-FFF2-40B4-BE49-F238E27FC236}">
+                <a16:creationId xmlns:a16="http://schemas.microsoft.com/office/drawing/2014/main" id="{F0D5568A-CF06-9F68-FA18-0CB2F7D792F2}"/>
+              </a:ext>
+            </a:extLst>
+          </p:cNvPr>
+          <p:cNvPicPr>
+            <a:picLocks noChangeAspect="1"/>
+          </p:cNvPicPr>
+          <p:nvPr/>
+        </p:nvPicPr>
+        <p:blipFill>
+          <a:blip r:embed="rId3"/>
+          <a:stretch>
+            <a:fillRect/>
+          </a:stretch>
+        </p:blipFill>
+        <p:spPr>
+          <a:xfrm>
+            <a:off x="10761933" y="0"/>
+            <a:ext cx="1430067" cy="6858000"/>
+          </a:xfrm>
+          <a:prstGeom prst="rect">
+            <a:avLst/>
+          </a:prstGeom>
+        </p:spPr>
+      </p:pic>
     </p:spTree>
     <p:extLst>
       <p:ext uri="{BB962C8B-B14F-4D97-AF65-F5344CB8AC3E}">
@@ -6673,10 +8267,153 @@
         </p:nvSpPr>
         <p:spPr/>
         <p:txBody>
+          <a:bodyPr>
+            <a:normAutofit fontScale="92500" lnSpcReduction="10000"/>
+          </a:bodyPr>
+          <a:lstStyle/>
+          <a:p>
+            <a:r>
+              <a:rPr lang="fr-FR" dirty="0"/>
+              <a:t>5 anomalies détectées en cours de recettage</a:t>
+            </a:r>
+          </a:p>
+          <a:p>
+            <a:pPr lvl="1"/>
+            <a:r>
+              <a:rPr lang="fr-FR" dirty="0"/>
+              <a:t>2 ont été corrigées en v.1.0.1</a:t>
+            </a:r>
+          </a:p>
+          <a:p>
+            <a:pPr lvl="1"/>
+            <a:r>
+              <a:rPr lang="fr-FR" dirty="0"/>
+              <a:t>3 sont en cours</a:t>
+            </a:r>
+          </a:p>
+          <a:p>
+            <a:endParaRPr lang="fr-FR" dirty="0"/>
+          </a:p>
+          <a:p>
+            <a:r>
+              <a:rPr lang="fr-FR" dirty="0"/>
+              <a:t>Pour la v.2 :</a:t>
+            </a:r>
+          </a:p>
+          <a:p>
+            <a:pPr marL="457200" lvl="1" indent="0">
+              <a:buNone/>
+            </a:pPr>
+            <a:r>
+              <a:rPr lang="fr-FR" dirty="0"/>
+              <a:t>Nouvelles fonctionnalités prévues :</a:t>
+            </a:r>
+          </a:p>
+          <a:p>
+            <a:pPr lvl="2"/>
+            <a:r>
+              <a:rPr lang="fr-FR" dirty="0"/>
+              <a:t>Création d’un nouveau compte</a:t>
+            </a:r>
+          </a:p>
+          <a:p>
+            <a:pPr lvl="2"/>
+            <a:r>
+              <a:rPr lang="fr-FR" dirty="0"/>
+              <a:t>Suivi météo</a:t>
+            </a:r>
+          </a:p>
+          <a:p>
+            <a:pPr lvl="1"/>
+            <a:endParaRPr lang="fr-FR" dirty="0"/>
+          </a:p>
+        </p:txBody>
+      </p:sp>
+      <p:sp>
+        <p:nvSpPr>
+          <p:cNvPr id="4" name="Espace réservé de la date 3">
+            <a:extLst>
+              <a:ext uri="{FF2B5EF4-FFF2-40B4-BE49-F238E27FC236}">
+                <a16:creationId xmlns:a16="http://schemas.microsoft.com/office/drawing/2014/main" id="{AFC59EFC-B946-919A-465E-E996B8912E58}"/>
+              </a:ext>
+            </a:extLst>
+          </p:cNvPr>
+          <p:cNvSpPr>
+            <a:spLocks noGrp="1"/>
+          </p:cNvSpPr>
+          <p:nvPr>
+            <p:ph type="dt" sz="half" idx="10"/>
+          </p:nvPr>
+        </p:nvSpPr>
+        <p:spPr/>
+        <p:txBody>
           <a:bodyPr/>
           <a:lstStyle/>
           <a:p>
-            <a:endParaRPr lang="fr-FR"/>
+            <a:r>
+              <a:rPr lang="fr-FR"/>
+              <a:t>20/10/2026</a:t>
+            </a:r>
+            <a:endParaRPr lang="en-US" dirty="0"/>
+          </a:p>
+        </p:txBody>
+      </p:sp>
+      <p:sp>
+        <p:nvSpPr>
+          <p:cNvPr id="5" name="Espace réservé du pied de page 4">
+            <a:extLst>
+              <a:ext uri="{FF2B5EF4-FFF2-40B4-BE49-F238E27FC236}">
+                <a16:creationId xmlns:a16="http://schemas.microsoft.com/office/drawing/2014/main" id="{06441A3C-80AE-F539-BD84-4B85CC40F02D}"/>
+              </a:ext>
+            </a:extLst>
+          </p:cNvPr>
+          <p:cNvSpPr>
+            <a:spLocks noGrp="1"/>
+          </p:cNvSpPr>
+          <p:nvPr>
+            <p:ph type="ftr" sz="quarter" idx="11"/>
+          </p:nvPr>
+        </p:nvSpPr>
+        <p:spPr/>
+        <p:txBody>
+          <a:bodyPr/>
+          <a:lstStyle/>
+          <a:p>
+            <a:r>
+              <a:rPr lang="fr-FR"/>
+              <a:t>VeloVille --- Cas Pratique --- Thomas Lerond</a:t>
+            </a:r>
+            <a:endParaRPr lang="en-US" dirty="0"/>
+          </a:p>
+        </p:txBody>
+      </p:sp>
+      <p:sp>
+        <p:nvSpPr>
+          <p:cNvPr id="6" name="Espace réservé du numéro de diapositive 5">
+            <a:extLst>
+              <a:ext uri="{FF2B5EF4-FFF2-40B4-BE49-F238E27FC236}">
+                <a16:creationId xmlns:a16="http://schemas.microsoft.com/office/drawing/2014/main" id="{A754DEE5-7ECB-65EF-7049-A14C078AE763}"/>
+              </a:ext>
+            </a:extLst>
+          </p:cNvPr>
+          <p:cNvSpPr>
+            <a:spLocks noGrp="1"/>
+          </p:cNvSpPr>
+          <p:nvPr>
+            <p:ph type="sldNum" sz="quarter" idx="12"/>
+          </p:nvPr>
+        </p:nvSpPr>
+        <p:spPr/>
+        <p:txBody>
+          <a:bodyPr/>
+          <a:lstStyle/>
+          <a:p>
+            <a:fld id="{D57F1E4F-1CFF-5643-939E-217C01CDF565}" type="slidenum">
+              <a:rPr lang="en-US" smtClean="0"/>
+              <a:pPr/>
+              <a:t>14</a:t>
+            </a:fld>
+            <a:endParaRPr lang="en-US" dirty="0"/>
           </a:p>
         </p:txBody>
       </p:sp>
@@ -6829,6 +8566,94 @@
           </a:p>
         </p:txBody>
       </p:sp>
+      <p:sp>
+        <p:nvSpPr>
+          <p:cNvPr id="4" name="Espace réservé de la date 3">
+            <a:extLst>
+              <a:ext uri="{FF2B5EF4-FFF2-40B4-BE49-F238E27FC236}">
+                <a16:creationId xmlns:a16="http://schemas.microsoft.com/office/drawing/2014/main" id="{6EFD8973-B0A3-E9AE-FD28-004C735073A5}"/>
+              </a:ext>
+            </a:extLst>
+          </p:cNvPr>
+          <p:cNvSpPr>
+            <a:spLocks noGrp="1"/>
+          </p:cNvSpPr>
+          <p:nvPr>
+            <p:ph type="dt" sz="half" idx="10"/>
+          </p:nvPr>
+        </p:nvSpPr>
+        <p:spPr/>
+        <p:txBody>
+          <a:bodyPr/>
+          <a:lstStyle/>
+          <a:p>
+            <a:r>
+              <a:rPr lang="fr-FR"/>
+              <a:t>20/10/2026</a:t>
+            </a:r>
+            <a:endParaRPr lang="en-US" dirty="0"/>
+          </a:p>
+        </p:txBody>
+      </p:sp>
+      <p:sp>
+        <p:nvSpPr>
+          <p:cNvPr id="5" name="Espace réservé du pied de page 4">
+            <a:extLst>
+              <a:ext uri="{FF2B5EF4-FFF2-40B4-BE49-F238E27FC236}">
+                <a16:creationId xmlns:a16="http://schemas.microsoft.com/office/drawing/2014/main" id="{FB10DFA7-62B5-E3BB-31D3-A0294EE3CC05}"/>
+              </a:ext>
+            </a:extLst>
+          </p:cNvPr>
+          <p:cNvSpPr>
+            <a:spLocks noGrp="1"/>
+          </p:cNvSpPr>
+          <p:nvPr>
+            <p:ph type="ftr" sz="quarter" idx="11"/>
+          </p:nvPr>
+        </p:nvSpPr>
+        <p:spPr/>
+        <p:txBody>
+          <a:bodyPr/>
+          <a:lstStyle/>
+          <a:p>
+            <a:r>
+              <a:rPr lang="fr-FR"/>
+              <a:t>VeloVille --- Cas Pratique --- Thomas Lerond</a:t>
+            </a:r>
+            <a:endParaRPr lang="en-US" dirty="0"/>
+          </a:p>
+        </p:txBody>
+      </p:sp>
+      <p:sp>
+        <p:nvSpPr>
+          <p:cNvPr id="6" name="Espace réservé du numéro de diapositive 5">
+            <a:extLst>
+              <a:ext uri="{FF2B5EF4-FFF2-40B4-BE49-F238E27FC236}">
+                <a16:creationId xmlns:a16="http://schemas.microsoft.com/office/drawing/2014/main" id="{F7804C17-76BB-DC3F-5E37-385FEABB6C19}"/>
+              </a:ext>
+            </a:extLst>
+          </p:cNvPr>
+          <p:cNvSpPr>
+            <a:spLocks noGrp="1"/>
+          </p:cNvSpPr>
+          <p:nvPr>
+            <p:ph type="sldNum" sz="quarter" idx="12"/>
+          </p:nvPr>
+        </p:nvSpPr>
+        <p:spPr/>
+        <p:txBody>
+          <a:bodyPr/>
+          <a:lstStyle/>
+          <a:p>
+            <a:fld id="{D57F1E4F-1CFF-5643-939E-217C01CDF565}" type="slidenum">
+              <a:rPr lang="en-US" smtClean="0"/>
+              <a:pPr/>
+              <a:t>2</a:t>
+            </a:fld>
+            <a:endParaRPr lang="en-US" dirty="0"/>
+          </a:p>
+        </p:txBody>
+      </p:sp>
     </p:spTree>
     <p:extLst>
       <p:ext uri="{BB962C8B-B14F-4D97-AF65-F5344CB8AC3E}">
@@ -6955,6 +8780,94 @@
               <a:t>Ce qui est livré et ce qui ne l'est pas.</a:t>
             </a:r>
             <a:endParaRPr lang="fr-FR" dirty="0"/>
+          </a:p>
+        </p:txBody>
+      </p:sp>
+      <p:sp>
+        <p:nvSpPr>
+          <p:cNvPr id="4" name="Espace réservé de la date 3">
+            <a:extLst>
+              <a:ext uri="{FF2B5EF4-FFF2-40B4-BE49-F238E27FC236}">
+                <a16:creationId xmlns:a16="http://schemas.microsoft.com/office/drawing/2014/main" id="{565B5350-D9CF-2D47-85D8-5E0C466DF2B9}"/>
+              </a:ext>
+            </a:extLst>
+          </p:cNvPr>
+          <p:cNvSpPr>
+            <a:spLocks noGrp="1"/>
+          </p:cNvSpPr>
+          <p:nvPr>
+            <p:ph type="dt" sz="half" idx="10"/>
+          </p:nvPr>
+        </p:nvSpPr>
+        <p:spPr/>
+        <p:txBody>
+          <a:bodyPr/>
+          <a:lstStyle/>
+          <a:p>
+            <a:r>
+              <a:rPr lang="fr-FR"/>
+              <a:t>20/10/2026</a:t>
+            </a:r>
+            <a:endParaRPr lang="en-US" dirty="0"/>
+          </a:p>
+        </p:txBody>
+      </p:sp>
+      <p:sp>
+        <p:nvSpPr>
+          <p:cNvPr id="5" name="Espace réservé du pied de page 4">
+            <a:extLst>
+              <a:ext uri="{FF2B5EF4-FFF2-40B4-BE49-F238E27FC236}">
+                <a16:creationId xmlns:a16="http://schemas.microsoft.com/office/drawing/2014/main" id="{32D25F29-0F72-BB9B-7EEB-63C5558EC25F}"/>
+              </a:ext>
+            </a:extLst>
+          </p:cNvPr>
+          <p:cNvSpPr>
+            <a:spLocks noGrp="1"/>
+          </p:cNvSpPr>
+          <p:nvPr>
+            <p:ph type="ftr" sz="quarter" idx="11"/>
+          </p:nvPr>
+        </p:nvSpPr>
+        <p:spPr/>
+        <p:txBody>
+          <a:bodyPr/>
+          <a:lstStyle/>
+          <a:p>
+            <a:r>
+              <a:rPr lang="fr-FR"/>
+              <a:t>VeloVille --- Cas Pratique --- Thomas Lerond</a:t>
+            </a:r>
+            <a:endParaRPr lang="en-US" dirty="0"/>
+          </a:p>
+        </p:txBody>
+      </p:sp>
+      <p:sp>
+        <p:nvSpPr>
+          <p:cNvPr id="6" name="Espace réservé du numéro de diapositive 5">
+            <a:extLst>
+              <a:ext uri="{FF2B5EF4-FFF2-40B4-BE49-F238E27FC236}">
+                <a16:creationId xmlns:a16="http://schemas.microsoft.com/office/drawing/2014/main" id="{344C9B2F-970A-B5A1-AFC4-722E5375AC05}"/>
+              </a:ext>
+            </a:extLst>
+          </p:cNvPr>
+          <p:cNvSpPr>
+            <a:spLocks noGrp="1"/>
+          </p:cNvSpPr>
+          <p:nvPr>
+            <p:ph type="sldNum" sz="quarter" idx="12"/>
+          </p:nvPr>
+        </p:nvSpPr>
+        <p:spPr/>
+        <p:txBody>
+          <a:bodyPr/>
+          <a:lstStyle/>
+          <a:p>
+            <a:fld id="{D57F1E4F-1CFF-5643-939E-217C01CDF565}" type="slidenum">
+              <a:rPr lang="en-US" smtClean="0"/>
+              <a:pPr/>
+              <a:t>3</a:t>
+            </a:fld>
+            <a:endParaRPr lang="en-US" dirty="0"/>
           </a:p>
         </p:txBody>
       </p:sp>
@@ -8174,6 +10087,94 @@
           </a:p>
         </p:txBody>
       </p:sp>
+      <p:sp>
+        <p:nvSpPr>
+          <p:cNvPr id="7" name="Espace réservé de la date 6">
+            <a:extLst>
+              <a:ext uri="{FF2B5EF4-FFF2-40B4-BE49-F238E27FC236}">
+                <a16:creationId xmlns:a16="http://schemas.microsoft.com/office/drawing/2014/main" id="{F88EDAB7-5847-9305-A4BE-003FB3B81D6D}"/>
+              </a:ext>
+            </a:extLst>
+          </p:cNvPr>
+          <p:cNvSpPr>
+            <a:spLocks noGrp="1"/>
+          </p:cNvSpPr>
+          <p:nvPr>
+            <p:ph type="dt" sz="half" idx="10"/>
+          </p:nvPr>
+        </p:nvSpPr>
+        <p:spPr/>
+        <p:txBody>
+          <a:bodyPr/>
+          <a:lstStyle/>
+          <a:p>
+            <a:r>
+              <a:rPr lang="fr-FR"/>
+              <a:t>20/10/2026</a:t>
+            </a:r>
+            <a:endParaRPr lang="en-US" dirty="0"/>
+          </a:p>
+        </p:txBody>
+      </p:sp>
+      <p:sp>
+        <p:nvSpPr>
+          <p:cNvPr id="8" name="Espace réservé du pied de page 7">
+            <a:extLst>
+              <a:ext uri="{FF2B5EF4-FFF2-40B4-BE49-F238E27FC236}">
+                <a16:creationId xmlns:a16="http://schemas.microsoft.com/office/drawing/2014/main" id="{E447C1E6-DBD3-28F6-1A6D-4ACE8B70F406}"/>
+              </a:ext>
+            </a:extLst>
+          </p:cNvPr>
+          <p:cNvSpPr>
+            <a:spLocks noGrp="1"/>
+          </p:cNvSpPr>
+          <p:nvPr>
+            <p:ph type="ftr" sz="quarter" idx="11"/>
+          </p:nvPr>
+        </p:nvSpPr>
+        <p:spPr/>
+        <p:txBody>
+          <a:bodyPr/>
+          <a:lstStyle/>
+          <a:p>
+            <a:r>
+              <a:rPr lang="fr-FR"/>
+              <a:t>VeloVille --- Cas Pratique --- Thomas Lerond</a:t>
+            </a:r>
+            <a:endParaRPr lang="en-US" dirty="0"/>
+          </a:p>
+        </p:txBody>
+      </p:sp>
+      <p:sp>
+        <p:nvSpPr>
+          <p:cNvPr id="9" name="Espace réservé du numéro de diapositive 8">
+            <a:extLst>
+              <a:ext uri="{FF2B5EF4-FFF2-40B4-BE49-F238E27FC236}">
+                <a16:creationId xmlns:a16="http://schemas.microsoft.com/office/drawing/2014/main" id="{9C590B35-9180-66A9-515E-8D8D67CEE5D3}"/>
+              </a:ext>
+            </a:extLst>
+          </p:cNvPr>
+          <p:cNvSpPr>
+            <a:spLocks noGrp="1"/>
+          </p:cNvSpPr>
+          <p:nvPr>
+            <p:ph type="sldNum" sz="quarter" idx="12"/>
+          </p:nvPr>
+        </p:nvSpPr>
+        <p:spPr/>
+        <p:txBody>
+          <a:bodyPr/>
+          <a:lstStyle/>
+          <a:p>
+            <a:fld id="{D57F1E4F-1CFF-5643-939E-217C01CDF565}" type="slidenum">
+              <a:rPr lang="en-US" smtClean="0"/>
+              <a:pPr/>
+              <a:t>4</a:t>
+            </a:fld>
+            <a:endParaRPr lang="en-US" dirty="0"/>
+          </a:p>
+        </p:txBody>
+      </p:sp>
     </p:spTree>
     <p:extLst>
       <p:ext uri="{BB962C8B-B14F-4D97-AF65-F5344CB8AC3E}">
@@ -8372,6 +10373,94 @@
           </a:p>
         </p:txBody>
       </p:sp>
+      <p:sp>
+        <p:nvSpPr>
+          <p:cNvPr id="6" name="Espace réservé de la date 5">
+            <a:extLst>
+              <a:ext uri="{FF2B5EF4-FFF2-40B4-BE49-F238E27FC236}">
+                <a16:creationId xmlns:a16="http://schemas.microsoft.com/office/drawing/2014/main" id="{83DE3A52-8C9A-D699-B530-1590620C1FB7}"/>
+              </a:ext>
+            </a:extLst>
+          </p:cNvPr>
+          <p:cNvSpPr>
+            <a:spLocks noGrp="1"/>
+          </p:cNvSpPr>
+          <p:nvPr>
+            <p:ph type="dt" sz="half" idx="10"/>
+          </p:nvPr>
+        </p:nvSpPr>
+        <p:spPr/>
+        <p:txBody>
+          <a:bodyPr/>
+          <a:lstStyle/>
+          <a:p>
+            <a:r>
+              <a:rPr lang="fr-FR"/>
+              <a:t>20/10/2026</a:t>
+            </a:r>
+            <a:endParaRPr lang="en-US" dirty="0"/>
+          </a:p>
+        </p:txBody>
+      </p:sp>
+      <p:sp>
+        <p:nvSpPr>
+          <p:cNvPr id="7" name="Espace réservé du pied de page 6">
+            <a:extLst>
+              <a:ext uri="{FF2B5EF4-FFF2-40B4-BE49-F238E27FC236}">
+                <a16:creationId xmlns:a16="http://schemas.microsoft.com/office/drawing/2014/main" id="{810B6886-7937-8F44-4157-A050B30B2964}"/>
+              </a:ext>
+            </a:extLst>
+          </p:cNvPr>
+          <p:cNvSpPr>
+            <a:spLocks noGrp="1"/>
+          </p:cNvSpPr>
+          <p:nvPr>
+            <p:ph type="ftr" sz="quarter" idx="11"/>
+          </p:nvPr>
+        </p:nvSpPr>
+        <p:spPr/>
+        <p:txBody>
+          <a:bodyPr/>
+          <a:lstStyle/>
+          <a:p>
+            <a:r>
+              <a:rPr lang="fr-FR"/>
+              <a:t>VeloVille --- Cas Pratique --- Thomas Lerond</a:t>
+            </a:r>
+            <a:endParaRPr lang="en-US" dirty="0"/>
+          </a:p>
+        </p:txBody>
+      </p:sp>
+      <p:sp>
+        <p:nvSpPr>
+          <p:cNvPr id="8" name="Espace réservé du numéro de diapositive 7">
+            <a:extLst>
+              <a:ext uri="{FF2B5EF4-FFF2-40B4-BE49-F238E27FC236}">
+                <a16:creationId xmlns:a16="http://schemas.microsoft.com/office/drawing/2014/main" id="{7FD701EA-3477-056B-E78A-9FFD3AA75D14}"/>
+              </a:ext>
+            </a:extLst>
+          </p:cNvPr>
+          <p:cNvSpPr>
+            <a:spLocks noGrp="1"/>
+          </p:cNvSpPr>
+          <p:nvPr>
+            <p:ph type="sldNum" sz="quarter" idx="12"/>
+          </p:nvPr>
+        </p:nvSpPr>
+        <p:spPr/>
+        <p:txBody>
+          <a:bodyPr/>
+          <a:lstStyle/>
+          <a:p>
+            <a:fld id="{D57F1E4F-1CFF-5643-939E-217C01CDF565}" type="slidenum">
+              <a:rPr lang="en-US" smtClean="0"/>
+              <a:pPr/>
+              <a:t>5</a:t>
+            </a:fld>
+            <a:endParaRPr lang="en-US" dirty="0"/>
+          </a:p>
+        </p:txBody>
+      </p:sp>
     </p:spTree>
     <p:extLst>
       <p:ext uri="{BB962C8B-B14F-4D97-AF65-F5344CB8AC3E}">
@@ -8635,6 +10724,94 @@
           </a:p>
         </p:txBody>
       </p:sp>
+      <p:sp>
+        <p:nvSpPr>
+          <p:cNvPr id="5" name="Espace réservé de la date 4">
+            <a:extLst>
+              <a:ext uri="{FF2B5EF4-FFF2-40B4-BE49-F238E27FC236}">
+                <a16:creationId xmlns:a16="http://schemas.microsoft.com/office/drawing/2014/main" id="{841C55A9-57A0-B931-5897-978A772B2DEC}"/>
+              </a:ext>
+            </a:extLst>
+          </p:cNvPr>
+          <p:cNvSpPr>
+            <a:spLocks noGrp="1"/>
+          </p:cNvSpPr>
+          <p:nvPr>
+            <p:ph type="dt" sz="half" idx="10"/>
+          </p:nvPr>
+        </p:nvSpPr>
+        <p:spPr/>
+        <p:txBody>
+          <a:bodyPr/>
+          <a:lstStyle/>
+          <a:p>
+            <a:r>
+              <a:rPr lang="fr-FR"/>
+              <a:t>20/10/2026</a:t>
+            </a:r>
+            <a:endParaRPr lang="en-US" dirty="0"/>
+          </a:p>
+        </p:txBody>
+      </p:sp>
+      <p:sp>
+        <p:nvSpPr>
+          <p:cNvPr id="6" name="Espace réservé du pied de page 5">
+            <a:extLst>
+              <a:ext uri="{FF2B5EF4-FFF2-40B4-BE49-F238E27FC236}">
+                <a16:creationId xmlns:a16="http://schemas.microsoft.com/office/drawing/2014/main" id="{45933634-D1FE-BB4F-2FDB-5176FF49C40B}"/>
+              </a:ext>
+            </a:extLst>
+          </p:cNvPr>
+          <p:cNvSpPr>
+            <a:spLocks noGrp="1"/>
+          </p:cNvSpPr>
+          <p:nvPr>
+            <p:ph type="ftr" sz="quarter" idx="11"/>
+          </p:nvPr>
+        </p:nvSpPr>
+        <p:spPr/>
+        <p:txBody>
+          <a:bodyPr/>
+          <a:lstStyle/>
+          <a:p>
+            <a:r>
+              <a:rPr lang="fr-FR"/>
+              <a:t>VeloVille --- Cas Pratique --- Thomas Lerond</a:t>
+            </a:r>
+            <a:endParaRPr lang="en-US" dirty="0"/>
+          </a:p>
+        </p:txBody>
+      </p:sp>
+      <p:sp>
+        <p:nvSpPr>
+          <p:cNvPr id="7" name="Espace réservé du numéro de diapositive 6">
+            <a:extLst>
+              <a:ext uri="{FF2B5EF4-FFF2-40B4-BE49-F238E27FC236}">
+                <a16:creationId xmlns:a16="http://schemas.microsoft.com/office/drawing/2014/main" id="{FF7E13B2-A8F4-390F-B2A8-4FA0577CC7F1}"/>
+              </a:ext>
+            </a:extLst>
+          </p:cNvPr>
+          <p:cNvSpPr>
+            <a:spLocks noGrp="1"/>
+          </p:cNvSpPr>
+          <p:nvPr>
+            <p:ph type="sldNum" sz="quarter" idx="12"/>
+          </p:nvPr>
+        </p:nvSpPr>
+        <p:spPr/>
+        <p:txBody>
+          <a:bodyPr/>
+          <a:lstStyle/>
+          <a:p>
+            <a:fld id="{D57F1E4F-1CFF-5643-939E-217C01CDF565}" type="slidenum">
+              <a:rPr lang="en-US" smtClean="0"/>
+              <a:pPr/>
+              <a:t>6</a:t>
+            </a:fld>
+            <a:endParaRPr lang="en-US" dirty="0"/>
+          </a:p>
+        </p:txBody>
+      </p:sp>
     </p:spTree>
     <p:extLst>
       <p:ext uri="{BB962C8B-B14F-4D97-AF65-F5344CB8AC3E}">
@@ -8799,6 +10976,94 @@
           </a:p>
         </p:txBody>
       </p:sp>
+      <p:sp>
+        <p:nvSpPr>
+          <p:cNvPr id="4" name="Espace réservé de la date 3">
+            <a:extLst>
+              <a:ext uri="{FF2B5EF4-FFF2-40B4-BE49-F238E27FC236}">
+                <a16:creationId xmlns:a16="http://schemas.microsoft.com/office/drawing/2014/main" id="{0BBEC850-D3AE-4C19-9CAA-9869A66A9FF4}"/>
+              </a:ext>
+            </a:extLst>
+          </p:cNvPr>
+          <p:cNvSpPr>
+            <a:spLocks noGrp="1"/>
+          </p:cNvSpPr>
+          <p:nvPr>
+            <p:ph type="dt" sz="half" idx="10"/>
+          </p:nvPr>
+        </p:nvSpPr>
+        <p:spPr/>
+        <p:txBody>
+          <a:bodyPr/>
+          <a:lstStyle/>
+          <a:p>
+            <a:r>
+              <a:rPr lang="fr-FR"/>
+              <a:t>20/10/2026</a:t>
+            </a:r>
+            <a:endParaRPr lang="en-US" dirty="0"/>
+          </a:p>
+        </p:txBody>
+      </p:sp>
+      <p:sp>
+        <p:nvSpPr>
+          <p:cNvPr id="5" name="Espace réservé du pied de page 4">
+            <a:extLst>
+              <a:ext uri="{FF2B5EF4-FFF2-40B4-BE49-F238E27FC236}">
+                <a16:creationId xmlns:a16="http://schemas.microsoft.com/office/drawing/2014/main" id="{AB3C532A-2B1E-DBFB-6B02-AD8CA9AC524F}"/>
+              </a:ext>
+            </a:extLst>
+          </p:cNvPr>
+          <p:cNvSpPr>
+            <a:spLocks noGrp="1"/>
+          </p:cNvSpPr>
+          <p:nvPr>
+            <p:ph type="ftr" sz="quarter" idx="11"/>
+          </p:nvPr>
+        </p:nvSpPr>
+        <p:spPr/>
+        <p:txBody>
+          <a:bodyPr/>
+          <a:lstStyle/>
+          <a:p>
+            <a:r>
+              <a:rPr lang="fr-FR"/>
+              <a:t>VeloVille --- Cas Pratique --- Thomas Lerond</a:t>
+            </a:r>
+            <a:endParaRPr lang="en-US" dirty="0"/>
+          </a:p>
+        </p:txBody>
+      </p:sp>
+      <p:sp>
+        <p:nvSpPr>
+          <p:cNvPr id="6" name="Espace réservé du numéro de diapositive 5">
+            <a:extLst>
+              <a:ext uri="{FF2B5EF4-FFF2-40B4-BE49-F238E27FC236}">
+                <a16:creationId xmlns:a16="http://schemas.microsoft.com/office/drawing/2014/main" id="{8E62AE3C-E3DC-CA5C-4299-3ED74D1F3C95}"/>
+              </a:ext>
+            </a:extLst>
+          </p:cNvPr>
+          <p:cNvSpPr>
+            <a:spLocks noGrp="1"/>
+          </p:cNvSpPr>
+          <p:nvPr>
+            <p:ph type="sldNum" sz="quarter" idx="12"/>
+          </p:nvPr>
+        </p:nvSpPr>
+        <p:spPr/>
+        <p:txBody>
+          <a:bodyPr/>
+          <a:lstStyle/>
+          <a:p>
+            <a:fld id="{D57F1E4F-1CFF-5643-939E-217C01CDF565}" type="slidenum">
+              <a:rPr lang="en-US" smtClean="0"/>
+              <a:pPr/>
+              <a:t>7</a:t>
+            </a:fld>
+            <a:endParaRPr lang="en-US" dirty="0"/>
+          </a:p>
+        </p:txBody>
+      </p:sp>
     </p:spTree>
     <p:extLst>
       <p:ext uri="{BB962C8B-B14F-4D97-AF65-F5344CB8AC3E}">
@@ -8954,7 +11219,7 @@
         </p:blipFill>
         <p:spPr>
           <a:xfrm>
-            <a:off x="5475616" y="1885457"/>
+            <a:off x="5475616" y="1764691"/>
             <a:ext cx="6468378" cy="2305372"/>
           </a:xfrm>
           <a:prstGeom prst="rect">
@@ -8962,6 +11227,94 @@
           </a:prstGeom>
         </p:spPr>
       </p:pic>
+      <p:sp>
+        <p:nvSpPr>
+          <p:cNvPr id="4" name="Espace réservé de la date 3">
+            <a:extLst>
+              <a:ext uri="{FF2B5EF4-FFF2-40B4-BE49-F238E27FC236}">
+                <a16:creationId xmlns:a16="http://schemas.microsoft.com/office/drawing/2014/main" id="{276EF9D0-BF05-3CA2-53DD-C32BF4FDDC86}"/>
+              </a:ext>
+            </a:extLst>
+          </p:cNvPr>
+          <p:cNvSpPr>
+            <a:spLocks noGrp="1"/>
+          </p:cNvSpPr>
+          <p:nvPr>
+            <p:ph type="dt" sz="half" idx="10"/>
+          </p:nvPr>
+        </p:nvSpPr>
+        <p:spPr/>
+        <p:txBody>
+          <a:bodyPr/>
+          <a:lstStyle/>
+          <a:p>
+            <a:r>
+              <a:rPr lang="fr-FR"/>
+              <a:t>20/10/2026</a:t>
+            </a:r>
+            <a:endParaRPr lang="en-US" dirty="0"/>
+          </a:p>
+        </p:txBody>
+      </p:sp>
+      <p:sp>
+        <p:nvSpPr>
+          <p:cNvPr id="6" name="Espace réservé du pied de page 5">
+            <a:extLst>
+              <a:ext uri="{FF2B5EF4-FFF2-40B4-BE49-F238E27FC236}">
+                <a16:creationId xmlns:a16="http://schemas.microsoft.com/office/drawing/2014/main" id="{890D46E5-07AE-03C4-080E-EA5F9FC148E9}"/>
+              </a:ext>
+            </a:extLst>
+          </p:cNvPr>
+          <p:cNvSpPr>
+            <a:spLocks noGrp="1"/>
+          </p:cNvSpPr>
+          <p:nvPr>
+            <p:ph type="ftr" sz="quarter" idx="11"/>
+          </p:nvPr>
+        </p:nvSpPr>
+        <p:spPr/>
+        <p:txBody>
+          <a:bodyPr/>
+          <a:lstStyle/>
+          <a:p>
+            <a:r>
+              <a:rPr lang="fr-FR"/>
+              <a:t>VeloVille --- Cas Pratique --- Thomas Lerond</a:t>
+            </a:r>
+            <a:endParaRPr lang="en-US" dirty="0"/>
+          </a:p>
+        </p:txBody>
+      </p:sp>
+      <p:sp>
+        <p:nvSpPr>
+          <p:cNvPr id="8" name="Espace réservé du numéro de diapositive 7">
+            <a:extLst>
+              <a:ext uri="{FF2B5EF4-FFF2-40B4-BE49-F238E27FC236}">
+                <a16:creationId xmlns:a16="http://schemas.microsoft.com/office/drawing/2014/main" id="{90E8D7F9-E1FB-8DE1-D55C-9B995C89AE55}"/>
+              </a:ext>
+            </a:extLst>
+          </p:cNvPr>
+          <p:cNvSpPr>
+            <a:spLocks noGrp="1"/>
+          </p:cNvSpPr>
+          <p:nvPr>
+            <p:ph type="sldNum" sz="quarter" idx="12"/>
+          </p:nvPr>
+        </p:nvSpPr>
+        <p:spPr/>
+        <p:txBody>
+          <a:bodyPr/>
+          <a:lstStyle/>
+          <a:p>
+            <a:fld id="{D57F1E4F-1CFF-5643-939E-217C01CDF565}" type="slidenum">
+              <a:rPr lang="en-US" smtClean="0"/>
+              <a:pPr/>
+              <a:t>8</a:t>
+            </a:fld>
+            <a:endParaRPr lang="en-US" dirty="0"/>
+          </a:p>
+        </p:txBody>
+      </p:sp>
       <p:pic>
         <p:nvPicPr>
           <p:cNvPr id="7" name="Image 6">
@@ -8984,7 +11337,7 @@
         </p:blipFill>
         <p:spPr>
           <a:xfrm>
-            <a:off x="7295145" y="4343134"/>
+            <a:off x="7295145" y="4075721"/>
             <a:ext cx="4648849" cy="1905266"/>
           </a:xfrm>
           <a:prstGeom prst="rect">
@@ -9081,7 +11434,7 @@
         </p:blipFill>
         <p:spPr>
           <a:xfrm>
-            <a:off x="7685365" y="1600919"/>
+            <a:off x="7685365" y="1454277"/>
             <a:ext cx="3951818" cy="4629095"/>
           </a:xfrm>
         </p:spPr>
@@ -9146,6 +11499,94 @@
           </a:prstGeom>
         </p:spPr>
       </p:pic>
+      <p:sp>
+        <p:nvSpPr>
+          <p:cNvPr id="3" name="Espace réservé de la date 2">
+            <a:extLst>
+              <a:ext uri="{FF2B5EF4-FFF2-40B4-BE49-F238E27FC236}">
+                <a16:creationId xmlns:a16="http://schemas.microsoft.com/office/drawing/2014/main" id="{F1596C10-50E8-044A-7681-2D83FE0E461E}"/>
+              </a:ext>
+            </a:extLst>
+          </p:cNvPr>
+          <p:cNvSpPr>
+            <a:spLocks noGrp="1"/>
+          </p:cNvSpPr>
+          <p:nvPr>
+            <p:ph type="dt" sz="half" idx="10"/>
+          </p:nvPr>
+        </p:nvSpPr>
+        <p:spPr/>
+        <p:txBody>
+          <a:bodyPr/>
+          <a:lstStyle/>
+          <a:p>
+            <a:r>
+              <a:rPr lang="fr-FR"/>
+              <a:t>20/10/2026</a:t>
+            </a:r>
+            <a:endParaRPr lang="en-US" dirty="0"/>
+          </a:p>
+        </p:txBody>
+      </p:sp>
+      <p:sp>
+        <p:nvSpPr>
+          <p:cNvPr id="4" name="Espace réservé du pied de page 3">
+            <a:extLst>
+              <a:ext uri="{FF2B5EF4-FFF2-40B4-BE49-F238E27FC236}">
+                <a16:creationId xmlns:a16="http://schemas.microsoft.com/office/drawing/2014/main" id="{88D3FE3D-FC00-6C6A-1ABA-18B6976F3257}"/>
+              </a:ext>
+            </a:extLst>
+          </p:cNvPr>
+          <p:cNvSpPr>
+            <a:spLocks noGrp="1"/>
+          </p:cNvSpPr>
+          <p:nvPr>
+            <p:ph type="ftr" sz="quarter" idx="11"/>
+          </p:nvPr>
+        </p:nvSpPr>
+        <p:spPr/>
+        <p:txBody>
+          <a:bodyPr/>
+          <a:lstStyle/>
+          <a:p>
+            <a:r>
+              <a:rPr lang="fr-FR"/>
+              <a:t>VeloVille --- Cas Pratique --- Thomas Lerond</a:t>
+            </a:r>
+            <a:endParaRPr lang="en-US" dirty="0"/>
+          </a:p>
+        </p:txBody>
+      </p:sp>
+      <p:sp>
+        <p:nvSpPr>
+          <p:cNvPr id="6" name="Espace réservé du numéro de diapositive 5">
+            <a:extLst>
+              <a:ext uri="{FF2B5EF4-FFF2-40B4-BE49-F238E27FC236}">
+                <a16:creationId xmlns:a16="http://schemas.microsoft.com/office/drawing/2014/main" id="{B8EAF211-3667-183F-62D9-83A4D936FC6C}"/>
+              </a:ext>
+            </a:extLst>
+          </p:cNvPr>
+          <p:cNvSpPr>
+            <a:spLocks noGrp="1"/>
+          </p:cNvSpPr>
+          <p:nvPr>
+            <p:ph type="sldNum" sz="quarter" idx="12"/>
+          </p:nvPr>
+        </p:nvSpPr>
+        <p:spPr/>
+        <p:txBody>
+          <a:bodyPr/>
+          <a:lstStyle/>
+          <a:p>
+            <a:fld id="{D57F1E4F-1CFF-5643-939E-217C01CDF565}" type="slidenum">
+              <a:rPr lang="en-US" smtClean="0"/>
+              <a:pPr/>
+              <a:t>9</a:t>
+            </a:fld>
+            <a:endParaRPr lang="en-US" dirty="0"/>
+          </a:p>
+        </p:txBody>
+      </p:sp>
     </p:spTree>
     <p:extLst>
       <p:ext uri="{BB962C8B-B14F-4D97-AF65-F5344CB8AC3E}">
@@ -9413,4 +11854,319 @@
     </a:ext>
   </a:extLst>
 </a:theme>
+</file>
+
+<file path=ppt/theme/theme2.xml><?xml version="1.0" encoding="utf-8"?>
+<a:theme xmlns:a="http://schemas.openxmlformats.org/drawingml/2006/main" name="Thème Office">
+  <a:themeElements>
+    <a:clrScheme name="Office">
+      <a:dk1>
+        <a:sysClr val="windowText" lastClr="000000"/>
+      </a:dk1>
+      <a:lt1>
+        <a:sysClr val="window" lastClr="FFFFFF"/>
+      </a:lt1>
+      <a:dk2>
+        <a:srgbClr val="0E2841"/>
+      </a:dk2>
+      <a:lt2>
+        <a:srgbClr val="E8E8E8"/>
+      </a:lt2>
+      <a:accent1>
+        <a:srgbClr val="156082"/>
+      </a:accent1>
+      <a:accent2>
+        <a:srgbClr val="E97132"/>
+      </a:accent2>
+      <a:accent3>
+        <a:srgbClr val="196B24"/>
+      </a:accent3>
+      <a:accent4>
+        <a:srgbClr val="0F9ED5"/>
+      </a:accent4>
+      <a:accent5>
+        <a:srgbClr val="A02B93"/>
+      </a:accent5>
+      <a:accent6>
+        <a:srgbClr val="4EA72E"/>
+      </a:accent6>
+      <a:hlink>
+        <a:srgbClr val="467886"/>
+      </a:hlink>
+      <a:folHlink>
+        <a:srgbClr val="96607D"/>
+      </a:folHlink>
+    </a:clrScheme>
+    <a:fontScheme name="Office">
+      <a:majorFont>
+        <a:latin typeface="Aptos Display" panose="02110004020202020204"/>
+        <a:ea typeface=""/>
+        <a:cs typeface=""/>
+        <a:font script="Jpan" typeface="游ゴシック Light"/>
+        <a:font script="Hang" typeface="맑은 고딕"/>
+        <a:font script="Hans" typeface="等线 Light"/>
+        <a:font script="Hant" typeface="新細明體"/>
+        <a:font script="Arab" typeface="Times New Roman"/>
+        <a:font script="Hebr" typeface="Times New Roman"/>
+        <a:font script="Thai" typeface="Angsana New"/>
+        <a:font script="Ethi" typeface="Nyala"/>
+        <a:font script="Beng" typeface="Vrinda"/>
+        <a:font script="Gujr" typeface="Shruti"/>
+        <a:font script="Khmr" typeface="MoolBoran"/>
+        <a:font script="Knda" typeface="Tunga"/>
+        <a:font script="Guru" typeface="Raavi"/>
+        <a:font script="Cans" typeface="Euphemia"/>
+        <a:font script="Cher" typeface="Plantagenet Cherokee"/>
+        <a:font script="Yiii" typeface="Microsoft Yi Baiti"/>
+        <a:font script="Tibt" typeface="Microsoft Himalaya"/>
+        <a:font script="Thaa" typeface="MV Boli"/>
+        <a:font script="Deva" typeface="Mangal"/>
+        <a:font script="Telu" typeface="Gautami"/>
+        <a:font script="Taml" typeface="Latha"/>
+        <a:font script="Syrc" typeface="Estrangelo Edessa"/>
+        <a:font script="Orya" typeface="Kalinga"/>
+        <a:font script="Mlym" typeface="Kartika"/>
+        <a:font script="Laoo" typeface="DokChampa"/>
+        <a:font script="Sinh" typeface="Iskoola Pota"/>
+        <a:font script="Mong" typeface="Mongolian Baiti"/>
+        <a:font script="Viet" typeface="Times New Roman"/>
+        <a:font script="Uigh" typeface="Microsoft Uighur"/>
+        <a:font script="Geor" typeface="Sylfaen"/>
+        <a:font script="Armn" typeface="Arial"/>
+        <a:font script="Bugi" typeface="Leelawadee UI"/>
+        <a:font script="Bopo" typeface="Microsoft JhengHei"/>
+        <a:font script="Java" typeface="Javanese Text"/>
+        <a:font script="Lisu" typeface="Segoe UI"/>
+        <a:font script="Mymr" typeface="Myanmar Text"/>
+        <a:font script="Nkoo" typeface="Ebrima"/>
+        <a:font script="Olck" typeface="Nirmala UI"/>
+        <a:font script="Osma" typeface="Ebrima"/>
+        <a:font script="Phag" typeface="Phagspa"/>
+        <a:font script="Syrn" typeface="Estrangelo Edessa"/>
+        <a:font script="Syrj" typeface="Estrangelo Edessa"/>
+        <a:font script="Syre" typeface="Estrangelo Edessa"/>
+        <a:font script="Sora" typeface="Nirmala UI"/>
+        <a:font script="Tale" typeface="Microsoft Tai Le"/>
+        <a:font script="Talu" typeface="Microsoft New Tai Lue"/>
+        <a:font script="Tfng" typeface="Ebrima"/>
+      </a:majorFont>
+      <a:minorFont>
+        <a:latin typeface="Aptos" panose="02110004020202020204"/>
+        <a:ea typeface=""/>
+        <a:cs typeface=""/>
+        <a:font script="Jpan" typeface="游ゴシック"/>
+        <a:font script="Hang" typeface="맑은 고딕"/>
+        <a:font script="Hans" typeface="等线"/>
+        <a:font script="Hant" typeface="新細明體"/>
+        <a:font script="Arab" typeface="Arial"/>
+        <a:font script="Hebr" typeface="Arial"/>
+        <a:font script="Thai" typeface="Cordia New"/>
+        <a:font script="Ethi" typeface="Nyala"/>
+        <a:font script="Beng" typeface="Vrinda"/>
+        <a:font script="Gujr" typeface="Shruti"/>
+        <a:font script="Khmr" typeface="DaunPenh"/>
+        <a:font script="Knda" typeface="Tunga"/>
+        <a:font script="Guru" typeface="Raavi"/>
+        <a:font script="Cans" typeface="Euphemia"/>
+        <a:font script="Cher" typeface="Plantagenet Cherokee"/>
+        <a:font script="Yiii" typeface="Microsoft Yi Baiti"/>
+        <a:font script="Tibt" typeface="Microsoft Himalaya"/>
+        <a:font script="Thaa" typeface="MV Boli"/>
+        <a:font script="Deva" typeface="Mangal"/>
+        <a:font script="Telu" typeface="Gautami"/>
+        <a:font script="Taml" typeface="Latha"/>
+        <a:font script="Syrc" typeface="Estrangelo Edessa"/>
+        <a:font script="Orya" typeface="Kalinga"/>
+        <a:font script="Mlym" typeface="Kartika"/>
+        <a:font script="Laoo" typeface="DokChampa"/>
+        <a:font script="Sinh" typeface="Iskoola Pota"/>
+        <a:font script="Mong" typeface="Mongolian Baiti"/>
+        <a:font script="Viet" typeface="Arial"/>
+        <a:font script="Uigh" typeface="Microsoft Uighur"/>
+        <a:font script="Geor" typeface="Sylfaen"/>
+        <a:font script="Armn" typeface="Arial"/>
+        <a:font script="Bugi" typeface="Leelawadee UI"/>
+        <a:font script="Bopo" typeface="Microsoft JhengHei"/>
+        <a:font script="Java" typeface="Javanese Text"/>
+        <a:font script="Lisu" typeface="Segoe UI"/>
+        <a:font script="Mymr" typeface="Myanmar Text"/>
+        <a:font script="Nkoo" typeface="Ebrima"/>
+        <a:font script="Olck" typeface="Nirmala UI"/>
+        <a:font script="Osma" typeface="Ebrima"/>
+        <a:font script="Phag" typeface="Phagspa"/>
+        <a:font script="Syrn" typeface="Estrangelo Edessa"/>
+        <a:font script="Syrj" typeface="Estrangelo Edessa"/>
+        <a:font script="Syre" typeface="Estrangelo Edessa"/>
+        <a:font script="Sora" typeface="Nirmala UI"/>
+        <a:font script="Tale" typeface="Microsoft Tai Le"/>
+        <a:font script="Talu" typeface="Microsoft New Tai Lue"/>
+        <a:font script="Tfng" typeface="Ebrima"/>
+      </a:minorFont>
+    </a:fontScheme>
+    <a:fmtScheme name="Office">
+      <a:fillStyleLst>
+        <a:solidFill>
+          <a:schemeClr val="phClr"/>
+        </a:solidFill>
+        <a:gradFill rotWithShape="1">
+          <a:gsLst>
+            <a:gs pos="0">
+              <a:schemeClr val="phClr">
+                <a:lumMod val="110000"/>
+                <a:satMod val="105000"/>
+                <a:tint val="67000"/>
+              </a:schemeClr>
+            </a:gs>
+            <a:gs pos="50000">
+              <a:schemeClr val="phClr">
+                <a:lumMod val="105000"/>
+                <a:satMod val="103000"/>
+                <a:tint val="73000"/>
+              </a:schemeClr>
+            </a:gs>
+            <a:gs pos="100000">
+              <a:schemeClr val="phClr">
+                <a:lumMod val="105000"/>
+                <a:satMod val="109000"/>
+                <a:tint val="81000"/>
+              </a:schemeClr>
+            </a:gs>
+          </a:gsLst>
+          <a:lin ang="5400000" scaled="0"/>
+        </a:gradFill>
+        <a:gradFill rotWithShape="1">
+          <a:gsLst>
+            <a:gs pos="0">
+              <a:schemeClr val="phClr">
+                <a:satMod val="103000"/>
+                <a:lumMod val="102000"/>
+                <a:tint val="94000"/>
+              </a:schemeClr>
+            </a:gs>
+            <a:gs pos="50000">
+              <a:schemeClr val="phClr">
+                <a:satMod val="110000"/>
+                <a:lumMod val="100000"/>
+                <a:shade val="100000"/>
+              </a:schemeClr>
+            </a:gs>
+            <a:gs pos="100000">
+              <a:schemeClr val="phClr">
+                <a:lumMod val="99000"/>
+                <a:satMod val="120000"/>
+                <a:shade val="78000"/>
+              </a:schemeClr>
+            </a:gs>
+          </a:gsLst>
+          <a:lin ang="5400000" scaled="0"/>
+        </a:gradFill>
+      </a:fillStyleLst>
+      <a:lnStyleLst>
+        <a:ln w="12700" cap="flat" cmpd="sng" algn="ctr">
+          <a:solidFill>
+            <a:schemeClr val="phClr"/>
+          </a:solidFill>
+          <a:prstDash val="solid"/>
+          <a:miter lim="800000"/>
+        </a:ln>
+        <a:ln w="19050" cap="flat" cmpd="sng" algn="ctr">
+          <a:solidFill>
+            <a:schemeClr val="phClr"/>
+          </a:solidFill>
+          <a:prstDash val="solid"/>
+          <a:miter lim="800000"/>
+        </a:ln>
+        <a:ln w="25400" cap="flat" cmpd="sng" algn="ctr">
+          <a:solidFill>
+            <a:schemeClr val="phClr"/>
+          </a:solidFill>
+          <a:prstDash val="solid"/>
+          <a:miter lim="800000"/>
+        </a:ln>
+      </a:lnStyleLst>
+      <a:effectStyleLst>
+        <a:effectStyle>
+          <a:effectLst/>
+        </a:effectStyle>
+        <a:effectStyle>
+          <a:effectLst/>
+        </a:effectStyle>
+        <a:effectStyle>
+          <a:effectLst>
+            <a:outerShdw blurRad="57150" dist="19050" dir="5400000" algn="ctr" rotWithShape="0">
+              <a:srgbClr val="000000">
+                <a:alpha val="63000"/>
+              </a:srgbClr>
+            </a:outerShdw>
+          </a:effectLst>
+        </a:effectStyle>
+      </a:effectStyleLst>
+      <a:bgFillStyleLst>
+        <a:solidFill>
+          <a:schemeClr val="phClr"/>
+        </a:solidFill>
+        <a:solidFill>
+          <a:schemeClr val="phClr">
+            <a:tint val="95000"/>
+            <a:satMod val="170000"/>
+          </a:schemeClr>
+        </a:solidFill>
+        <a:gradFill rotWithShape="1">
+          <a:gsLst>
+            <a:gs pos="0">
+              <a:schemeClr val="phClr">
+                <a:tint val="93000"/>
+                <a:satMod val="150000"/>
+                <a:shade val="98000"/>
+                <a:lumMod val="102000"/>
+              </a:schemeClr>
+            </a:gs>
+            <a:gs pos="50000">
+              <a:schemeClr val="phClr">
+                <a:tint val="98000"/>
+                <a:satMod val="130000"/>
+                <a:shade val="90000"/>
+                <a:lumMod val="103000"/>
+              </a:schemeClr>
+            </a:gs>
+            <a:gs pos="100000">
+              <a:schemeClr val="phClr">
+                <a:shade val="63000"/>
+                <a:satMod val="120000"/>
+              </a:schemeClr>
+            </a:gs>
+          </a:gsLst>
+          <a:lin ang="5400000" scaled="0"/>
+        </a:gradFill>
+      </a:bgFillStyleLst>
+    </a:fmtScheme>
+  </a:themeElements>
+  <a:objectDefaults>
+    <a:lnDef>
+      <a:spPr/>
+      <a:bodyPr/>
+      <a:lstStyle/>
+      <a:style>
+        <a:lnRef idx="2">
+          <a:schemeClr val="accent1"/>
+        </a:lnRef>
+        <a:fillRef idx="0">
+          <a:schemeClr val="accent1"/>
+        </a:fillRef>
+        <a:effectRef idx="1">
+          <a:schemeClr val="accent1"/>
+        </a:effectRef>
+        <a:fontRef idx="minor">
+          <a:schemeClr val="tx1"/>
+        </a:fontRef>
+      </a:style>
+    </a:lnDef>
+  </a:objectDefaults>
+  <a:extraClrSchemeLst/>
+  <a:extLst>
+    <a:ext uri="{05A4C25C-085E-4340-85A3-A5531E510DB2}">
+      <thm15:themeFamily xmlns:thm15="http://schemas.microsoft.com/office/thememl/2012/main" name="Office Theme" id="{2E142A2C-CD16-42D6-873A-C26D2A0506FA}" vid="{1BDDFF52-6CD6-40A5-AB3C-68EB2F1E4D0A}"/>
+    </a:ext>
+  </a:extLst>
+</a:theme>
 </file>